--- a/PPT/开源软件通识-第十八周汇报.pptx
+++ b/PPT/开源软件通识-第十八周汇报.pptx
@@ -4776,7 +4776,7 @@
         </p:nvSpPr>
         <p:spPr>
           <a:xfrm>
-            <a:off x="889000" y="2184400"/>
+            <a:off x="889000" y="1257572"/>
             <a:ext cx="3302000" cy="304800"/>
           </a:xfrm>
           <a:prstGeom prst="rect">
@@ -4800,7 +4800,7 @@
               <a:defRPr/>
             </a:pPr>
             <a:r>
-              <a:rPr lang="en-US" sz="1600" b="1" i="0" u="none" strike="noStrike">
+              <a:rPr lang="en-US" sz="2000" b="1" i="0" u="none" strike="noStrike">
                 <a:solidFill>
                   <a:srgbClr val="1F2937"/>
                 </a:solidFill>
@@ -4811,7 +4811,7 @@
               </a:rPr>
               <a:t>基础环境构建</a:t>
             </a:r>
-            <a:endParaRPr lang="en-US" sz="1100"/>
+            <a:endParaRPr lang="en-US" sz="1400"/>
           </a:p>
         </p:txBody>
       </p:sp>
@@ -4829,7 +4829,7 @@
         </p:nvSpPr>
         <p:spPr>
           <a:xfrm>
-            <a:off x="889000" y="2667000"/>
+            <a:off x="889000" y="1891676"/>
             <a:ext cx="3302000" cy="1524000"/>
           </a:xfrm>
           <a:prstGeom prst="rect">
@@ -4853,7 +4853,7 @@
               <a:defRPr/>
             </a:pPr>
             <a:r>
-              <a:rPr lang="en-US" sz="1300" b="1" i="0" u="none" strike="noStrike">
+              <a:rPr lang="en-US" sz="1600" b="1" i="0" u="none" strike="noStrike">
                 <a:solidFill>
                   <a:srgbClr val="374151"/>
                 </a:solidFill>
@@ -4865,7 +4865,7 @@
               <a:t>Nginx 核心配置：</a:t>
             </a:r>
             <a:r>
-              <a:rPr lang="en-US" sz="1200" b="0" i="0" u="none" strike="noStrike">
+              <a:rPr lang="en-US" sz="1600" b="0" i="0" u="none" strike="noStrike">
                 <a:solidFill>
                   <a:srgbClr val="4B5563"/>
                 </a:solidFill>
@@ -4876,7 +4876,7 @@
               </a:rPr>
               <a:t>完成反向代理与负载均衡配置，解决前后端服务的路由分发与跨域基础问题。</a:t>
             </a:r>
-            <a:endParaRPr lang="en-US" sz="1100"/>
+            <a:endParaRPr lang="en-US" sz="1400"/>
           </a:p>
           <a:p>
             <a:pPr marL="0" indent="0" algn="l">
@@ -4885,7 +4885,7 @@
               </a:lnSpc>
             </a:pPr>
             <a:r>
-              <a:rPr lang="en-US" sz="1300" b="1" i="0" u="none" strike="noStrike">
+              <a:rPr lang="en-US" sz="1600" b="1" i="0" u="none" strike="noStrike">
                 <a:solidFill>
                   <a:srgbClr val="374151"/>
                 </a:solidFill>
@@ -4897,7 +4897,7 @@
               <a:t>服务进程守护：</a:t>
             </a:r>
             <a:r>
-              <a:rPr lang="en-US" sz="1200" b="0" i="0" u="none" strike="noStrike">
+              <a:rPr lang="en-US" sz="1600" b="0" i="0" u="none" strike="noStrike">
                 <a:solidFill>
                   <a:srgbClr val="4B5563"/>
                 </a:solidFill>
@@ -4925,7 +4925,7 @@
         </p:nvSpPr>
         <p:spPr>
           <a:xfrm>
-            <a:off x="4699000" y="2184400"/>
+            <a:off x="940931" y="3828527"/>
             <a:ext cx="3302000" cy="304800"/>
           </a:xfrm>
           <a:prstGeom prst="rect">
@@ -4949,7 +4949,7 @@
               <a:defRPr/>
             </a:pPr>
             <a:r>
-              <a:rPr lang="en-US" sz="1600" b="1" i="0" u="none" strike="noStrike">
+              <a:rPr lang="en-US" sz="2000" b="1" i="0" u="none" strike="noStrike">
                 <a:solidFill>
                   <a:srgbClr val="1F2937"/>
                 </a:solidFill>
@@ -4960,7 +4960,7 @@
               </a:rPr>
               <a:t>数据与安全策略</a:t>
             </a:r>
-            <a:endParaRPr lang="en-US" sz="1100"/>
+            <a:endParaRPr lang="en-US" sz="1400"/>
           </a:p>
         </p:txBody>
       </p:sp>
@@ -4978,7 +4978,7 @@
         </p:nvSpPr>
         <p:spPr>
           <a:xfrm>
-            <a:off x="4699000" y="2667000"/>
+            <a:off x="940931" y="4429461"/>
             <a:ext cx="3302000" cy="1524000"/>
           </a:xfrm>
           <a:prstGeom prst="rect">
@@ -5002,7 +5002,7 @@
               <a:defRPr/>
             </a:pPr>
             <a:r>
-              <a:rPr lang="en-US" sz="1300" b="1" i="0" u="none" strike="noStrike">
+              <a:rPr lang="en-US" sz="1600" b="1" i="0" u="none" strike="noStrike">
                 <a:solidFill>
                   <a:srgbClr val="374151"/>
                 </a:solidFill>
@@ -5014,7 +5014,7 @@
               <a:t>数据库体系化：</a:t>
             </a:r>
             <a:r>
-              <a:rPr lang="en-US" sz="1200" b="0" i="0" u="none" strike="noStrike">
+              <a:rPr lang="en-US" sz="1600" b="0" i="0" u="none" strike="noStrike">
                 <a:solidFill>
                   <a:srgbClr val="4B5563"/>
                 </a:solidFill>
@@ -5025,7 +5025,7 @@
               </a:rPr>
               <a:t>完成用户权限分级、Schema 设计优化，并制定定期自动备份脚本，防范数据丢失风险。</a:t>
             </a:r>
-            <a:endParaRPr lang="en-US" sz="1100"/>
+            <a:endParaRPr lang="en-US" sz="1400"/>
           </a:p>
           <a:p>
             <a:pPr marL="0" indent="0" algn="l">
@@ -5034,7 +5034,7 @@
               </a:lnSpc>
             </a:pPr>
             <a:r>
-              <a:rPr lang="en-US" sz="1300" b="1" i="0" u="none" strike="noStrike">
+              <a:rPr lang="en-US" sz="1600" b="1" i="0" u="none" strike="noStrike">
                 <a:solidFill>
                   <a:srgbClr val="374151"/>
                 </a:solidFill>
@@ -5046,7 +5046,7 @@
               <a:t>静态资源管理：</a:t>
             </a:r>
             <a:r>
-              <a:rPr lang="en-US" sz="1200" b="0" i="0" u="none" strike="noStrike">
+              <a:rPr lang="en-US" sz="1600" b="0" i="0" u="none" strike="noStrike">
                 <a:solidFill>
                   <a:srgbClr val="4B5563"/>
                 </a:solidFill>
@@ -5060,155 +5060,36 @@
           </a:p>
         </p:txBody>
       </p:sp>
-      <p:sp>
-        <p:nvSpPr>
-          <p:cNvPr id="17" name="AutoShape 15">
+      <p:pic>
+        <p:nvPicPr>
+          <p:cNvPr id="6" name="图片 5">
             <a:extLst>
               <a:ext uri="{FF2B5EF4-FFF2-40B4-BE49-F238E27FC236}">
-                <a16:creationId xmlns:a16="http://schemas.microsoft.com/office/drawing/2014/main" id="{878FA23F-98B4-4684-9070-0B05D4B90A15}"/>
+                <a16:creationId xmlns:a16="http://schemas.microsoft.com/office/drawing/2014/main" id="{879229A4-5A92-427E-9038-0AA6D8FDDD17}"/>
               </a:ext>
             </a:extLst>
           </p:cNvPr>
-          <p:cNvSpPr/>
+          <p:cNvPicPr>
+            <a:picLocks noChangeAspect="1"/>
+          </p:cNvPicPr>
           <p:nvPr/>
-        </p:nvSpPr>
+        </p:nvPicPr>
+        <p:blipFill>
+          <a:blip r:embed="rId4"/>
+          <a:stretch>
+            <a:fillRect/>
+          </a:stretch>
+        </p:blipFill>
         <p:spPr>
           <a:xfrm>
-            <a:off x="8509000" y="2184400"/>
-            <a:ext cx="3302000" cy="304800"/>
+            <a:off x="4672315" y="2619672"/>
+            <a:ext cx="6873836" cy="1920406"/>
           </a:xfrm>
           <a:prstGeom prst="rect">
             <a:avLst/>
           </a:prstGeom>
-          <a:noFill/>
-          <a:ln w="12700" cap="flat" cmpd="sng">
-            <a:noFill/>
-            <a:prstDash val="solid"/>
-            <a:round/>
-          </a:ln>
         </p:spPr>
-        <p:txBody>
-          <a:bodyPr vert="horz" wrap="square" lIns="0" tIns="0" rIns="0" bIns="0" rtlCol="0" anchor="ctr" anchorCtr="0"/>
-          <a:lstStyle/>
-          <a:p>
-            <a:pPr marL="0" indent="0" algn="l">
-              <a:lnSpc>
-                <a:spcPct val="125000"/>
-              </a:lnSpc>
-              <a:defRPr/>
-            </a:pPr>
-            <a:r>
-              <a:rPr lang="en-US" sz="1600" b="1" i="0" u="none" strike="noStrike">
-                <a:solidFill>
-                  <a:srgbClr val="1F2937"/>
-                </a:solidFill>
-                <a:latin typeface="Noto Sans SC"/>
-                <a:ea typeface="Noto Sans SC"/>
-                <a:cs typeface="Noto Sans SC"/>
-                <a:sym typeface="Noto Sans SC"/>
-              </a:rPr>
-              <a:t>疑难杂症攻克</a:t>
-            </a:r>
-            <a:endParaRPr lang="en-US" sz="1100"/>
-          </a:p>
-        </p:txBody>
-      </p:sp>
-      <p:sp>
-        <p:nvSpPr>
-          <p:cNvPr id="18" name="AutoShape 16">
-            <a:extLst>
-              <a:ext uri="{FF2B5EF4-FFF2-40B4-BE49-F238E27FC236}">
-                <a16:creationId xmlns:a16="http://schemas.microsoft.com/office/drawing/2014/main" id="{2563B0DC-2EDC-4DDD-804C-61F41C4BC209}"/>
-              </a:ext>
-            </a:extLst>
-          </p:cNvPr>
-          <p:cNvSpPr/>
-          <p:nvPr/>
-        </p:nvSpPr>
-        <p:spPr>
-          <a:xfrm>
-            <a:off x="8509000" y="2667000"/>
-            <a:ext cx="3302000" cy="1524000"/>
-          </a:xfrm>
-          <a:prstGeom prst="rect">
-            <a:avLst/>
-          </a:prstGeom>
-          <a:noFill/>
-          <a:ln w="12700" cap="flat" cmpd="sng">
-            <a:noFill/>
-            <a:prstDash val="solid"/>
-            <a:round/>
-          </a:ln>
-        </p:spPr>
-        <p:txBody>
-          <a:bodyPr vert="horz" wrap="square" lIns="0" tIns="0" rIns="0" bIns="0" rtlCol="0" anchor="ctr" anchorCtr="0"/>
-          <a:lstStyle/>
-          <a:p>
-            <a:pPr marL="0" indent="0" algn="l">
-              <a:lnSpc>
-                <a:spcPct val="116666"/>
-              </a:lnSpc>
-              <a:defRPr/>
-            </a:pPr>
-            <a:r>
-              <a:rPr lang="en-US" sz="1300" b="1" i="0" u="none" strike="noStrike">
-                <a:solidFill>
-                  <a:srgbClr val="374151"/>
-                </a:solidFill>
-                <a:latin typeface="Noto Sans SC"/>
-                <a:ea typeface="Noto Sans SC"/>
-                <a:cs typeface="Noto Sans SC"/>
-                <a:sym typeface="Noto Sans SC"/>
-              </a:rPr>
-              <a:t>路由刷新 404：</a:t>
-            </a:r>
-            <a:r>
-              <a:rPr lang="en-US" sz="1200" b="0" i="0" u="none" strike="noStrike">
-                <a:solidFill>
-                  <a:srgbClr val="4B5563"/>
-                </a:solidFill>
-                <a:latin typeface="Noto Sans SC"/>
-                <a:ea typeface="Noto Sans SC"/>
-                <a:cs typeface="Noto Sans SC"/>
-                <a:sym typeface="Noto Sans SC"/>
-              </a:rPr>
-              <a:t>利用 try_files 指令将非真实文件请求重定向至 index.html，完美适配前端 History 模式。</a:t>
-            </a:r>
-            <a:endParaRPr lang="en-US" sz="1100"/>
-          </a:p>
-          <a:p>
-            <a:pPr marL="0" indent="0" algn="l">
-              <a:lnSpc>
-                <a:spcPct val="116666"/>
-              </a:lnSpc>
-            </a:pPr>
-            <a:r>
-              <a:rPr lang="en-US" sz="1300" b="1" i="0" u="none" strike="noStrike">
-                <a:solidFill>
-                  <a:srgbClr val="374151"/>
-                </a:solidFill>
-                <a:latin typeface="Noto Sans SC"/>
-                <a:ea typeface="Noto Sans SC"/>
-                <a:cs typeface="Noto Sans SC"/>
-                <a:sym typeface="Noto Sans SC"/>
-              </a:rPr>
-              <a:t>跨域请求拦截：</a:t>
-            </a:r>
-            <a:r>
-              <a:rPr lang="en-US" sz="1200" b="0" i="0" u="none" strike="noStrike">
-                <a:solidFill>
-                  <a:srgbClr val="4B5563"/>
-                </a:solidFill>
-                <a:latin typeface="Noto Sans SC"/>
-                <a:ea typeface="Noto Sans SC"/>
-                <a:cs typeface="Noto Sans SC"/>
-                <a:sym typeface="Noto Sans SC"/>
-              </a:rPr>
-              <a:t>配置 Access-Control 响应头，建立安全的 CORS 白名单，实现前后端域名的合法互通。</a:t>
-            </a:r>
-          </a:p>
-        </p:txBody>
-      </p:sp>
+      </p:pic>
     </p:spTree>
   </p:cSld>
   <p:clrMapOvr>
@@ -5295,29 +5176,6 @@
           </a:p>
         </p:txBody>
       </p:sp>
-      <p:sp>
-        <p:nvSpPr>
-          <p:cNvPr id="2" name="powerpoint template design by DAJU_PPT正版来源小红书大橘PPT微信DAJU_PPT请勿抄袭搬运！盗版必究！"/>
-          <p:cNvSpPr>
-            <a:spLocks noGrp="1"/>
-          </p:cNvSpPr>
-          <p:nvPr>
-            <p:ph type="sldNum" sz="quarter" idx="4"/>
-          </p:nvPr>
-        </p:nvSpPr>
-        <p:spPr/>
-        <p:txBody>
-          <a:bodyPr/>
-          <a:lstStyle/>
-          <a:p>
-            <a:fld id="{41DDFDCD-830D-4E78-9097-B6B92A67D61F}" type="slidenum">
-              <a:rPr lang="zh-CN" altLang="en-US" smtClean="0"/>
-              <a:t>4</a:t>
-            </a:fld>
-            <a:endParaRPr lang="zh-CN" altLang="en-US"/>
-          </a:p>
-        </p:txBody>
-      </p:sp>
       <p:pic>
         <p:nvPicPr>
           <p:cNvPr id="5" name="图片 4"/>
@@ -5348,748 +5206,42 @@
           </a:prstGeom>
         </p:spPr>
       </p:pic>
-      <p:sp>
-        <p:nvSpPr>
-          <p:cNvPr id="11" name="AutoShape 5">
+      <p:pic>
+        <p:nvPicPr>
+          <p:cNvPr id="6" name="图片 5" descr="图形用户界面, 文本, 应用程序&#10;&#10;AI 生成的内容可能不正确。">
             <a:extLst>
               <a:ext uri="{FF2B5EF4-FFF2-40B4-BE49-F238E27FC236}">
-                <a16:creationId xmlns:a16="http://schemas.microsoft.com/office/drawing/2014/main" id="{BDA81917-EA7D-49C3-9967-A23AB079DCD8}"/>
+                <a16:creationId xmlns:a16="http://schemas.microsoft.com/office/drawing/2014/main" id="{A674026E-F6F6-4C92-BD29-289533192084}"/>
               </a:ext>
             </a:extLst>
           </p:cNvPr>
-          <p:cNvSpPr/>
+          <p:cNvPicPr>
+            <a:picLocks noChangeAspect="1"/>
+          </p:cNvPicPr>
           <p:nvPr/>
-        </p:nvSpPr>
+        </p:nvPicPr>
+        <p:blipFill>
+          <a:blip r:embed="rId4">
+            <a:extLst>
+              <a:ext uri="{28A0092B-C50C-407E-A947-70E740481C1C}">
+                <a14:useLocalDpi xmlns:a14="http://schemas.microsoft.com/office/drawing/2010/main" val="0"/>
+              </a:ext>
+            </a:extLst>
+          </a:blip>
+          <a:stretch>
+            <a:fillRect/>
+          </a:stretch>
+        </p:blipFill>
         <p:spPr>
           <a:xfrm>
-            <a:off x="762000" y="2159000"/>
-            <a:ext cx="5334000" cy="304800"/>
+            <a:off x="2345166" y="1437959"/>
+            <a:ext cx="8383791" cy="3982082"/>
           </a:xfrm>
           <a:prstGeom prst="rect">
             <a:avLst/>
           </a:prstGeom>
-          <a:noFill/>
-          <a:ln w="12700" cap="flat" cmpd="sng">
-            <a:noFill/>
-            <a:prstDash val="solid"/>
-            <a:round/>
-          </a:ln>
         </p:spPr>
-        <p:txBody>
-          <a:bodyPr vert="horz" wrap="square" lIns="0" tIns="0" rIns="0" bIns="0" rtlCol="0" anchor="ctr" anchorCtr="0"/>
-          <a:lstStyle/>
-          <a:p>
-            <a:pPr marL="0" indent="0" algn="l">
-              <a:lnSpc>
-                <a:spcPct val="125000"/>
-              </a:lnSpc>
-              <a:defRPr/>
-            </a:pPr>
-            <a:r>
-              <a:rPr lang="en-US" sz="1600" b="1" i="0" u="none" strike="noStrike">
-                <a:solidFill>
-                  <a:srgbClr val="1F2937"/>
-                </a:solidFill>
-                <a:latin typeface="Noto Sans SC"/>
-                <a:ea typeface="Noto Sans SC"/>
-                <a:cs typeface="Noto Sans SC"/>
-                <a:sym typeface="Noto Sans SC"/>
-              </a:rPr>
-              <a:t>风险防御：构建代码安全底座</a:t>
-            </a:r>
-            <a:endParaRPr lang="en-US" sz="1100"/>
-          </a:p>
-        </p:txBody>
-      </p:sp>
-      <p:sp>
-        <p:nvSpPr>
-          <p:cNvPr id="12" name="AutoShape 7">
-            <a:extLst>
-              <a:ext uri="{FF2B5EF4-FFF2-40B4-BE49-F238E27FC236}">
-                <a16:creationId xmlns:a16="http://schemas.microsoft.com/office/drawing/2014/main" id="{3D50131C-78A6-4F9A-8BBE-FD7170974F6F}"/>
-              </a:ext>
-            </a:extLst>
-          </p:cNvPr>
-          <p:cNvSpPr/>
-          <p:nvPr/>
-        </p:nvSpPr>
-        <p:spPr>
-          <a:xfrm>
-            <a:off x="762000" y="2921000"/>
-            <a:ext cx="5207000" cy="279400"/>
-          </a:xfrm>
-          <a:prstGeom prst="rect">
-            <a:avLst/>
-          </a:prstGeom>
-          <a:noFill/>
-          <a:ln w="12700" cap="flat" cmpd="sng">
-            <a:noFill/>
-            <a:prstDash val="solid"/>
-            <a:round/>
-          </a:ln>
-        </p:spPr>
-        <p:txBody>
-          <a:bodyPr vert="horz" wrap="square" lIns="0" tIns="0" rIns="0" bIns="0" rtlCol="0" anchor="ctr" anchorCtr="0"/>
-          <a:lstStyle/>
-          <a:p>
-            <a:pPr marL="0" indent="0" algn="l">
-              <a:lnSpc>
-                <a:spcPct val="125000"/>
-              </a:lnSpc>
-              <a:defRPr/>
-            </a:pPr>
-            <a:r>
-              <a:rPr lang="en-US" sz="1400" b="1" i="0" u="none" strike="noStrike">
-                <a:solidFill>
-                  <a:srgbClr val="4ADE80"/>
-                </a:solidFill>
-                <a:latin typeface="Noto Sans SC"/>
-                <a:ea typeface="Noto Sans SC"/>
-                <a:cs typeface="Noto Sans SC"/>
-                <a:sym typeface="Noto Sans SC"/>
-              </a:rPr>
-              <a:t>SQL注入防线</a:t>
-            </a:r>
-            <a:endParaRPr lang="en-US" sz="1100"/>
-          </a:p>
-        </p:txBody>
-      </p:sp>
-      <p:sp>
-        <p:nvSpPr>
-          <p:cNvPr id="19" name="AutoShape 8">
-            <a:extLst>
-              <a:ext uri="{FF2B5EF4-FFF2-40B4-BE49-F238E27FC236}">
-                <a16:creationId xmlns:a16="http://schemas.microsoft.com/office/drawing/2014/main" id="{27CD0A55-F112-4167-BB26-31E42481985C}"/>
-              </a:ext>
-            </a:extLst>
-          </p:cNvPr>
-          <p:cNvSpPr/>
-          <p:nvPr/>
-        </p:nvSpPr>
-        <p:spPr>
-          <a:xfrm>
-            <a:off x="762000" y="3302000"/>
-            <a:ext cx="5207000" cy="609600"/>
-          </a:xfrm>
-          <a:prstGeom prst="rect">
-            <a:avLst/>
-          </a:prstGeom>
-          <a:noFill/>
-          <a:ln w="12700" cap="flat" cmpd="sng">
-            <a:noFill/>
-            <a:prstDash val="solid"/>
-            <a:round/>
-          </a:ln>
-        </p:spPr>
-        <p:txBody>
-          <a:bodyPr vert="horz" wrap="square" lIns="0" tIns="0" rIns="0" bIns="0" rtlCol="0" anchor="ctr" anchorCtr="0"/>
-          <a:lstStyle/>
-          <a:p>
-            <a:pPr marL="0" indent="0" algn="l">
-              <a:lnSpc>
-                <a:spcPct val="108333"/>
-              </a:lnSpc>
-              <a:defRPr/>
-            </a:pPr>
-            <a:r>
-              <a:rPr lang="en-US" sz="1300" b="0" i="0" u="none" strike="noStrike">
-                <a:solidFill>
-                  <a:srgbClr val="4B5563"/>
-                </a:solidFill>
-                <a:latin typeface="Noto Sans SC"/>
-                <a:ea typeface="Noto Sans SC"/>
-                <a:cs typeface="Noto Sans SC"/>
-                <a:sym typeface="Noto Sans SC"/>
-              </a:rPr>
-              <a:t>全面禁用字符串拼接SQL，强制推行MyBatis参数化查询。通过预编译机制隔离用户输入与执行逻辑，从根源消除注入漏洞。</a:t>
-            </a:r>
-            <a:endParaRPr lang="en-US" sz="1100"/>
-          </a:p>
-        </p:txBody>
-      </p:sp>
-      <p:sp>
-        <p:nvSpPr>
-          <p:cNvPr id="20" name="AutoShape 9">
-            <a:extLst>
-              <a:ext uri="{FF2B5EF4-FFF2-40B4-BE49-F238E27FC236}">
-                <a16:creationId xmlns:a16="http://schemas.microsoft.com/office/drawing/2014/main" id="{536A35BC-9BAF-4ADF-9521-74B668367525}"/>
-              </a:ext>
-            </a:extLst>
-          </p:cNvPr>
-          <p:cNvSpPr/>
-          <p:nvPr/>
-        </p:nvSpPr>
-        <p:spPr>
-          <a:xfrm>
-            <a:off x="762000" y="4318000"/>
-            <a:ext cx="5207000" cy="279400"/>
-          </a:xfrm>
-          <a:prstGeom prst="rect">
-            <a:avLst/>
-          </a:prstGeom>
-          <a:noFill/>
-          <a:ln w="12700" cap="flat" cmpd="sng">
-            <a:noFill/>
-            <a:prstDash val="solid"/>
-            <a:round/>
-          </a:ln>
-        </p:spPr>
-        <p:txBody>
-          <a:bodyPr vert="horz" wrap="square" lIns="0" tIns="0" rIns="0" bIns="0" rtlCol="0" anchor="ctr" anchorCtr="0"/>
-          <a:lstStyle/>
-          <a:p>
-            <a:pPr marL="0" indent="0" algn="l">
-              <a:lnSpc>
-                <a:spcPct val="125000"/>
-              </a:lnSpc>
-              <a:defRPr/>
-            </a:pPr>
-            <a:r>
-              <a:rPr lang="en-US" sz="1400" b="1" i="0" u="none" strike="noStrike">
-                <a:solidFill>
-                  <a:srgbClr val="4ADE80"/>
-                </a:solidFill>
-                <a:latin typeface="Noto Sans SC"/>
-                <a:ea typeface="Noto Sans SC"/>
-                <a:cs typeface="Noto Sans SC"/>
-                <a:sym typeface="Noto Sans SC"/>
-              </a:rPr>
-              <a:t>敏感数据加密</a:t>
-            </a:r>
-            <a:endParaRPr lang="en-US" sz="1100"/>
-          </a:p>
-        </p:txBody>
-      </p:sp>
-      <p:sp>
-        <p:nvSpPr>
-          <p:cNvPr id="21" name="AutoShape 10">
-            <a:extLst>
-              <a:ext uri="{FF2B5EF4-FFF2-40B4-BE49-F238E27FC236}">
-                <a16:creationId xmlns:a16="http://schemas.microsoft.com/office/drawing/2014/main" id="{EF69CCE0-AFF1-4465-BDCB-C3AF54791110}"/>
-              </a:ext>
-            </a:extLst>
-          </p:cNvPr>
-          <p:cNvSpPr/>
-          <p:nvPr/>
-        </p:nvSpPr>
-        <p:spPr>
-          <a:xfrm>
-            <a:off x="762000" y="4699000"/>
-            <a:ext cx="5207000" cy="609600"/>
-          </a:xfrm>
-          <a:prstGeom prst="rect">
-            <a:avLst/>
-          </a:prstGeom>
-          <a:noFill/>
-          <a:ln w="12700" cap="flat" cmpd="sng">
-            <a:noFill/>
-            <a:prstDash val="solid"/>
-            <a:round/>
-          </a:ln>
-        </p:spPr>
-        <p:txBody>
-          <a:bodyPr vert="horz" wrap="square" lIns="0" tIns="0" rIns="0" bIns="0" rtlCol="0" anchor="ctr" anchorCtr="0"/>
-          <a:lstStyle/>
-          <a:p>
-            <a:pPr marL="0" indent="0" algn="l">
-              <a:lnSpc>
-                <a:spcPct val="108333"/>
-              </a:lnSpc>
-              <a:defRPr/>
-            </a:pPr>
-            <a:r>
-              <a:rPr lang="en-US" sz="1300" b="0" i="0" u="none" strike="noStrike">
-                <a:solidFill>
-                  <a:srgbClr val="4B5563"/>
-                </a:solidFill>
-                <a:latin typeface="Noto Sans SC"/>
-                <a:ea typeface="Noto Sans SC"/>
-                <a:cs typeface="Noto Sans SC"/>
-                <a:sym typeface="Noto Sans SC"/>
-              </a:rPr>
-              <a:t>建立数据安全规范，对密码、密钥等敏感信息强制使用BCrypt等哈希算法进行单向加密存储，杜绝明文数据泄露隐患。</a:t>
-            </a:r>
-            <a:endParaRPr lang="en-US" sz="1100"/>
-          </a:p>
-        </p:txBody>
-      </p:sp>
-      <p:sp>
-        <p:nvSpPr>
-          <p:cNvPr id="22" name="AutoShape 11">
-            <a:extLst>
-              <a:ext uri="{FF2B5EF4-FFF2-40B4-BE49-F238E27FC236}">
-                <a16:creationId xmlns:a16="http://schemas.microsoft.com/office/drawing/2014/main" id="{C7A8E3EF-E2B3-411E-ADD7-2EB5396C3688}"/>
-              </a:ext>
-            </a:extLst>
-          </p:cNvPr>
-          <p:cNvSpPr/>
-          <p:nvPr/>
-        </p:nvSpPr>
-        <p:spPr>
-          <a:xfrm>
-            <a:off x="762000" y="5588000"/>
-            <a:ext cx="5207000" cy="279400"/>
-          </a:xfrm>
-          <a:prstGeom prst="rect">
-            <a:avLst/>
-          </a:prstGeom>
-          <a:noFill/>
-          <a:ln w="12700" cap="flat" cmpd="sng">
-            <a:noFill/>
-            <a:prstDash val="solid"/>
-            <a:round/>
-          </a:ln>
-        </p:spPr>
-        <p:txBody>
-          <a:bodyPr vert="horz" wrap="square" lIns="0" tIns="0" rIns="0" bIns="0" rtlCol="0" anchor="ctr" anchorCtr="0"/>
-          <a:lstStyle/>
-          <a:p>
-            <a:pPr marL="0" indent="0" algn="l">
-              <a:lnSpc>
-                <a:spcPct val="125000"/>
-              </a:lnSpc>
-              <a:defRPr/>
-            </a:pPr>
-            <a:r>
-              <a:rPr lang="en-US" sz="1400" b="1" i="0" u="none" strike="noStrike">
-                <a:solidFill>
-                  <a:srgbClr val="4ADE80"/>
-                </a:solidFill>
-                <a:latin typeface="Noto Sans SC"/>
-                <a:ea typeface="Noto Sans SC"/>
-                <a:cs typeface="Noto Sans SC"/>
-                <a:sym typeface="Noto Sans SC"/>
-              </a:rPr>
-              <a:t>全局异常治理</a:t>
-            </a:r>
-            <a:endParaRPr lang="en-US" sz="1100"/>
-          </a:p>
-        </p:txBody>
-      </p:sp>
-      <p:sp>
-        <p:nvSpPr>
-          <p:cNvPr id="23" name="AutoShape 12">
-            <a:extLst>
-              <a:ext uri="{FF2B5EF4-FFF2-40B4-BE49-F238E27FC236}">
-                <a16:creationId xmlns:a16="http://schemas.microsoft.com/office/drawing/2014/main" id="{7A1DDD0C-CD10-4AE6-B3B8-B2AE958FB01C}"/>
-              </a:ext>
-            </a:extLst>
-          </p:cNvPr>
-          <p:cNvSpPr/>
-          <p:nvPr/>
-        </p:nvSpPr>
-        <p:spPr>
-          <a:xfrm>
-            <a:off x="762000" y="5969000"/>
-            <a:ext cx="5207000" cy="609600"/>
-          </a:xfrm>
-          <a:prstGeom prst="rect">
-            <a:avLst/>
-          </a:prstGeom>
-          <a:noFill/>
-          <a:ln w="12700" cap="flat" cmpd="sng">
-            <a:noFill/>
-            <a:prstDash val="solid"/>
-            <a:round/>
-          </a:ln>
-        </p:spPr>
-        <p:txBody>
-          <a:bodyPr vert="horz" wrap="square" lIns="0" tIns="0" rIns="0" bIns="0" rtlCol="0" anchor="ctr" anchorCtr="0"/>
-          <a:lstStyle/>
-          <a:p>
-            <a:pPr marL="0" indent="0" algn="l">
-              <a:lnSpc>
-                <a:spcPct val="108333"/>
-              </a:lnSpc>
-              <a:defRPr/>
-            </a:pPr>
-            <a:r>
-              <a:rPr lang="en-US" sz="1300" b="0" i="0" u="none" strike="noStrike">
-                <a:solidFill>
-                  <a:srgbClr val="4B5563"/>
-                </a:solidFill>
-                <a:latin typeface="Noto Sans SC"/>
-                <a:ea typeface="Noto Sans SC"/>
-                <a:cs typeface="Noto Sans SC"/>
-                <a:sym typeface="Noto Sans SC"/>
-              </a:rPr>
-              <a:t>设计统一的异常拦截与处理体系，封装业务异常码，避免直接暴露系统堆栈，提升用户体验与系统健壮性。</a:t>
-            </a:r>
-            <a:endParaRPr lang="en-US" sz="1100"/>
-          </a:p>
-        </p:txBody>
-      </p:sp>
-      <p:sp>
-        <p:nvSpPr>
-          <p:cNvPr id="24" name="AutoShape 13">
-            <a:extLst>
-              <a:ext uri="{FF2B5EF4-FFF2-40B4-BE49-F238E27FC236}">
-                <a16:creationId xmlns:a16="http://schemas.microsoft.com/office/drawing/2014/main" id="{CD66C550-64E3-43EE-84FB-66995B6A606C}"/>
-              </a:ext>
-            </a:extLst>
-          </p:cNvPr>
-          <p:cNvSpPr/>
-          <p:nvPr/>
-        </p:nvSpPr>
-        <p:spPr>
-          <a:xfrm>
-            <a:off x="6350000" y="2159000"/>
-            <a:ext cx="5334000" cy="304800"/>
-          </a:xfrm>
-          <a:prstGeom prst="rect">
-            <a:avLst/>
-          </a:prstGeom>
-          <a:noFill/>
-          <a:ln w="12700" cap="flat" cmpd="sng">
-            <a:noFill/>
-            <a:prstDash val="solid"/>
-            <a:round/>
-          </a:ln>
-        </p:spPr>
-        <p:txBody>
-          <a:bodyPr vert="horz" wrap="square" lIns="0" tIns="0" rIns="0" bIns="0" rtlCol="0" anchor="ctr" anchorCtr="0"/>
-          <a:lstStyle/>
-          <a:p>
-            <a:pPr marL="0" indent="0" algn="l">
-              <a:lnSpc>
-                <a:spcPct val="125000"/>
-              </a:lnSpc>
-              <a:defRPr/>
-            </a:pPr>
-            <a:r>
-              <a:rPr lang="en-US" sz="1600" b="1" i="0" u="none" strike="noStrike">
-                <a:solidFill>
-                  <a:srgbClr val="1F2937"/>
-                </a:solidFill>
-                <a:latin typeface="Noto Sans SC"/>
-                <a:ea typeface="Noto Sans SC"/>
-                <a:cs typeface="Noto Sans SC"/>
-                <a:sym typeface="Noto Sans SC"/>
-              </a:rPr>
-              <a:t>规范治理：提升代码可维护性</a:t>
-            </a:r>
-            <a:endParaRPr lang="en-US" sz="1100"/>
-          </a:p>
-        </p:txBody>
-      </p:sp>
-      <p:sp>
-        <p:nvSpPr>
-          <p:cNvPr id="25" name="AutoShape 15">
-            <a:extLst>
-              <a:ext uri="{FF2B5EF4-FFF2-40B4-BE49-F238E27FC236}">
-                <a16:creationId xmlns:a16="http://schemas.microsoft.com/office/drawing/2014/main" id="{261EFDD2-59B2-4495-BBF6-E9C23DE9D559}"/>
-              </a:ext>
-            </a:extLst>
-          </p:cNvPr>
-          <p:cNvSpPr/>
-          <p:nvPr/>
-        </p:nvSpPr>
-        <p:spPr>
-          <a:xfrm>
-            <a:off x="6350000" y="2921000"/>
-            <a:ext cx="5207000" cy="279400"/>
-          </a:xfrm>
-          <a:prstGeom prst="rect">
-            <a:avLst/>
-          </a:prstGeom>
-          <a:noFill/>
-          <a:ln w="12700" cap="flat" cmpd="sng">
-            <a:noFill/>
-            <a:prstDash val="solid"/>
-            <a:round/>
-          </a:ln>
-        </p:spPr>
-        <p:txBody>
-          <a:bodyPr vert="horz" wrap="square" lIns="0" tIns="0" rIns="0" bIns="0" rtlCol="0" anchor="ctr" anchorCtr="0"/>
-          <a:lstStyle/>
-          <a:p>
-            <a:pPr marL="0" indent="0" algn="l">
-              <a:lnSpc>
-                <a:spcPct val="125000"/>
-              </a:lnSpc>
-              <a:defRPr/>
-            </a:pPr>
-            <a:r>
-              <a:rPr lang="en-US" sz="1400" b="1" i="0" u="none" strike="noStrike">
-                <a:solidFill>
-                  <a:srgbClr val="4ADE80"/>
-                </a:solidFill>
-                <a:latin typeface="Noto Sans SC"/>
-                <a:ea typeface="Noto Sans SC"/>
-                <a:cs typeface="Noto Sans SC"/>
-                <a:sym typeface="Noto Sans SC"/>
-              </a:rPr>
-              <a:t>语义化命名约定</a:t>
-            </a:r>
-            <a:endParaRPr lang="en-US" sz="1100"/>
-          </a:p>
-        </p:txBody>
-      </p:sp>
-      <p:sp>
-        <p:nvSpPr>
-          <p:cNvPr id="26" name="AutoShape 16">
-            <a:extLst>
-              <a:ext uri="{FF2B5EF4-FFF2-40B4-BE49-F238E27FC236}">
-                <a16:creationId xmlns:a16="http://schemas.microsoft.com/office/drawing/2014/main" id="{E23985C0-BEA5-4435-870F-6C5D1C1A9217}"/>
-              </a:ext>
-            </a:extLst>
-          </p:cNvPr>
-          <p:cNvSpPr/>
-          <p:nvPr/>
-        </p:nvSpPr>
-        <p:spPr>
-          <a:xfrm>
-            <a:off x="6350000" y="3302000"/>
-            <a:ext cx="5207000" cy="609600"/>
-          </a:xfrm>
-          <a:prstGeom prst="rect">
-            <a:avLst/>
-          </a:prstGeom>
-          <a:noFill/>
-          <a:ln w="12700" cap="flat" cmpd="sng">
-            <a:noFill/>
-            <a:prstDash val="solid"/>
-            <a:round/>
-          </a:ln>
-        </p:spPr>
-        <p:txBody>
-          <a:bodyPr vert="horz" wrap="square" lIns="0" tIns="0" rIns="0" bIns="0" rtlCol="0" anchor="ctr" anchorCtr="0"/>
-          <a:lstStyle/>
-          <a:p>
-            <a:pPr marL="0" indent="0" algn="l">
-              <a:lnSpc>
-                <a:spcPct val="108333"/>
-              </a:lnSpc>
-              <a:defRPr/>
-            </a:pPr>
-            <a:r>
-              <a:rPr lang="en-US" sz="1300" b="0" i="0" u="none" strike="noStrike">
-                <a:solidFill>
-                  <a:srgbClr val="4B5563"/>
-                </a:solidFill>
-                <a:latin typeface="Noto Sans SC"/>
-                <a:ea typeface="Noto Sans SC"/>
-                <a:cs typeface="Noto Sans SC"/>
-                <a:sym typeface="Noto Sans SC"/>
-              </a:rPr>
-              <a:t>统一变量、函数与类的命名标准，坚持“见名知意”原则。采用驼峰命名法与英文语义化表达，降低代码阅读成本。</a:t>
-            </a:r>
-            <a:endParaRPr lang="en-US" sz="1100"/>
-          </a:p>
-        </p:txBody>
-      </p:sp>
-      <p:sp>
-        <p:nvSpPr>
-          <p:cNvPr id="27" name="AutoShape 17">
-            <a:extLst>
-              <a:ext uri="{FF2B5EF4-FFF2-40B4-BE49-F238E27FC236}">
-                <a16:creationId xmlns:a16="http://schemas.microsoft.com/office/drawing/2014/main" id="{99F36AF0-5D0D-4A6C-8B94-41040D72F333}"/>
-              </a:ext>
-            </a:extLst>
-          </p:cNvPr>
-          <p:cNvSpPr/>
-          <p:nvPr/>
-        </p:nvSpPr>
-        <p:spPr>
-          <a:xfrm>
-            <a:off x="6350000" y="4318000"/>
-            <a:ext cx="5207000" cy="279400"/>
-          </a:xfrm>
-          <a:prstGeom prst="rect">
-            <a:avLst/>
-          </a:prstGeom>
-          <a:noFill/>
-          <a:ln w="12700" cap="flat" cmpd="sng">
-            <a:noFill/>
-            <a:prstDash val="solid"/>
-            <a:round/>
-          </a:ln>
-        </p:spPr>
-        <p:txBody>
-          <a:bodyPr vert="horz" wrap="square" lIns="0" tIns="0" rIns="0" bIns="0" rtlCol="0" anchor="ctr" anchorCtr="0"/>
-          <a:lstStyle/>
-          <a:p>
-            <a:pPr marL="0" indent="0" algn="l">
-              <a:lnSpc>
-                <a:spcPct val="125000"/>
-              </a:lnSpc>
-              <a:defRPr/>
-            </a:pPr>
-            <a:r>
-              <a:rPr lang="en-US" sz="1400" b="1" i="0" u="none" strike="noStrike">
-                <a:solidFill>
-                  <a:srgbClr val="4ADE80"/>
-                </a:solidFill>
-                <a:latin typeface="Noto Sans SC"/>
-                <a:ea typeface="Noto Sans SC"/>
-                <a:cs typeface="Noto Sans SC"/>
-                <a:sym typeface="Noto Sans SC"/>
-              </a:rPr>
-              <a:t>逻辑沉淀注释</a:t>
-            </a:r>
-            <a:endParaRPr lang="en-US" sz="1100"/>
-          </a:p>
-        </p:txBody>
-      </p:sp>
-      <p:sp>
-        <p:nvSpPr>
-          <p:cNvPr id="28" name="AutoShape 18">
-            <a:extLst>
-              <a:ext uri="{FF2B5EF4-FFF2-40B4-BE49-F238E27FC236}">
-                <a16:creationId xmlns:a16="http://schemas.microsoft.com/office/drawing/2014/main" id="{61BA2FC3-0703-4001-AD48-261FFE20CF38}"/>
-              </a:ext>
-            </a:extLst>
-          </p:cNvPr>
-          <p:cNvSpPr/>
-          <p:nvPr/>
-        </p:nvSpPr>
-        <p:spPr>
-          <a:xfrm>
-            <a:off x="6350000" y="4699000"/>
-            <a:ext cx="5207000" cy="609600"/>
-          </a:xfrm>
-          <a:prstGeom prst="rect">
-            <a:avLst/>
-          </a:prstGeom>
-          <a:noFill/>
-          <a:ln w="12700" cap="flat" cmpd="sng">
-            <a:noFill/>
-            <a:prstDash val="solid"/>
-            <a:round/>
-          </a:ln>
-        </p:spPr>
-        <p:txBody>
-          <a:bodyPr vert="horz" wrap="square" lIns="0" tIns="0" rIns="0" bIns="0" rtlCol="0" anchor="ctr" anchorCtr="0"/>
-          <a:lstStyle/>
-          <a:p>
-            <a:pPr marL="0" indent="0" algn="l">
-              <a:lnSpc>
-                <a:spcPct val="108333"/>
-              </a:lnSpc>
-              <a:defRPr/>
-            </a:pPr>
-            <a:r>
-              <a:rPr lang="en-US" sz="1300" b="0" i="0" u="none" strike="noStrike">
-                <a:solidFill>
-                  <a:srgbClr val="4B5563"/>
-                </a:solidFill>
-                <a:latin typeface="Noto Sans SC"/>
-                <a:ea typeface="Noto Sans SC"/>
-                <a:cs typeface="Noto Sans SC"/>
-                <a:sym typeface="Noto Sans SC"/>
-              </a:rPr>
-              <a:t>对核心业务规则、复杂算法及边界条件添加结构化注释。让注释成为设计思路的载体，助力团队快速理解与维护。</a:t>
-            </a:r>
-            <a:endParaRPr lang="en-US" sz="1100"/>
-          </a:p>
-        </p:txBody>
-      </p:sp>
-      <p:sp>
-        <p:nvSpPr>
-          <p:cNvPr id="29" name="AutoShape 19">
-            <a:extLst>
-              <a:ext uri="{FF2B5EF4-FFF2-40B4-BE49-F238E27FC236}">
-                <a16:creationId xmlns:a16="http://schemas.microsoft.com/office/drawing/2014/main" id="{D5D6303F-38CD-4154-B8FB-6A8D61BE0A5B}"/>
-              </a:ext>
-            </a:extLst>
-          </p:cNvPr>
-          <p:cNvSpPr/>
-          <p:nvPr/>
-        </p:nvSpPr>
-        <p:spPr>
-          <a:xfrm>
-            <a:off x="6350000" y="5588000"/>
-            <a:ext cx="5207000" cy="279400"/>
-          </a:xfrm>
-          <a:prstGeom prst="rect">
-            <a:avLst/>
-          </a:prstGeom>
-          <a:noFill/>
-          <a:ln w="12700" cap="flat" cmpd="sng">
-            <a:noFill/>
-            <a:prstDash val="solid"/>
-            <a:round/>
-          </a:ln>
-        </p:spPr>
-        <p:txBody>
-          <a:bodyPr vert="horz" wrap="square" lIns="0" tIns="0" rIns="0" bIns="0" rtlCol="0" anchor="ctr" anchorCtr="0"/>
-          <a:lstStyle/>
-          <a:p>
-            <a:pPr marL="0" indent="0" algn="l">
-              <a:lnSpc>
-                <a:spcPct val="125000"/>
-              </a:lnSpc>
-              <a:defRPr/>
-            </a:pPr>
-            <a:r>
-              <a:rPr lang="en-US" sz="1400" b="1" i="0" u="none" strike="noStrike">
-                <a:solidFill>
-                  <a:srgbClr val="4ADE80"/>
-                </a:solidFill>
-                <a:latin typeface="Noto Sans SC"/>
-                <a:ea typeface="Noto Sans SC"/>
-                <a:cs typeface="Noto Sans SC"/>
-                <a:sym typeface="Noto Sans SC"/>
-              </a:rPr>
-              <a:t>分层职责边界</a:t>
-            </a:r>
-            <a:endParaRPr lang="en-US" sz="1100"/>
-          </a:p>
-        </p:txBody>
-      </p:sp>
-      <p:sp>
-        <p:nvSpPr>
-          <p:cNvPr id="30" name="AutoShape 20">
-            <a:extLst>
-              <a:ext uri="{FF2B5EF4-FFF2-40B4-BE49-F238E27FC236}">
-                <a16:creationId xmlns:a16="http://schemas.microsoft.com/office/drawing/2014/main" id="{077262B8-3956-41B7-B014-B3C70C655E89}"/>
-              </a:ext>
-            </a:extLst>
-          </p:cNvPr>
-          <p:cNvSpPr/>
-          <p:nvPr/>
-        </p:nvSpPr>
-        <p:spPr>
-          <a:xfrm>
-            <a:off x="6350000" y="5969000"/>
-            <a:ext cx="5207000" cy="609600"/>
-          </a:xfrm>
-          <a:prstGeom prst="rect">
-            <a:avLst/>
-          </a:prstGeom>
-          <a:noFill/>
-          <a:ln w="12700" cap="flat" cmpd="sng">
-            <a:noFill/>
-            <a:prstDash val="solid"/>
-            <a:round/>
-          </a:ln>
-        </p:spPr>
-        <p:txBody>
-          <a:bodyPr vert="horz" wrap="square" lIns="0" tIns="0" rIns="0" bIns="0" rtlCol="0" anchor="ctr" anchorCtr="0"/>
-          <a:lstStyle/>
-          <a:p>
-            <a:pPr marL="0" indent="0" algn="l">
-              <a:lnSpc>
-                <a:spcPct val="108333"/>
-              </a:lnSpc>
-              <a:defRPr/>
-            </a:pPr>
-            <a:r>
-              <a:rPr lang="en-US" sz="1300" b="0" i="0" u="none" strike="noStrike">
-                <a:solidFill>
-                  <a:srgbClr val="4B5563"/>
-                </a:solidFill>
-                <a:latin typeface="Noto Sans SC"/>
-                <a:ea typeface="Noto Sans SC"/>
-                <a:cs typeface="Noto Sans SC"/>
-                <a:sym typeface="Noto Sans SC"/>
-              </a:rPr>
-              <a:t>严格执行 Controller 接入、Service 业务、Mapper 持久化的分层架构。明确各层职责，实现业务逻辑的高内聚低耦合。</a:t>
-            </a:r>
-            <a:endParaRPr lang="en-US" sz="1100"/>
-          </a:p>
-        </p:txBody>
-      </p:sp>
+      </p:pic>
     </p:spTree>
     <p:extLst>
       <p:ext uri="{BB962C8B-B14F-4D97-AF65-F5344CB8AC3E}">
@@ -6223,502 +5375,42 @@
           </a:prstGeom>
         </p:spPr>
       </p:pic>
-      <p:sp>
-        <p:nvSpPr>
-          <p:cNvPr id="31" name="AutoShape 5">
+      <p:pic>
+        <p:nvPicPr>
+          <p:cNvPr id="3" name="图片 2" descr="图形用户界面, 文本, 应用程序, 电子邮件&#10;&#10;AI 生成的内容可能不正确。">
             <a:extLst>
               <a:ext uri="{FF2B5EF4-FFF2-40B4-BE49-F238E27FC236}">
-                <a16:creationId xmlns:a16="http://schemas.microsoft.com/office/drawing/2014/main" id="{F07A41CD-50D6-46AD-BC5F-F772FCA4EB96}"/>
+                <a16:creationId xmlns:a16="http://schemas.microsoft.com/office/drawing/2014/main" id="{DB00907A-7F7A-44CD-861C-8FE3F65DDF22}"/>
               </a:ext>
             </a:extLst>
           </p:cNvPr>
-          <p:cNvSpPr/>
+          <p:cNvPicPr>
+            <a:picLocks noChangeAspect="1"/>
+          </p:cNvPicPr>
           <p:nvPr/>
-        </p:nvSpPr>
+        </p:nvPicPr>
+        <p:blipFill>
+          <a:blip r:embed="rId4">
+            <a:extLst>
+              <a:ext uri="{28A0092B-C50C-407E-A947-70E740481C1C}">
+                <a14:useLocalDpi xmlns:a14="http://schemas.microsoft.com/office/drawing/2010/main" val="0"/>
+              </a:ext>
+            </a:extLst>
+          </a:blip>
+          <a:stretch>
+            <a:fillRect/>
+          </a:stretch>
+        </p:blipFill>
         <p:spPr>
           <a:xfrm>
-            <a:off x="889000" y="1778000"/>
-            <a:ext cx="5080000" cy="304800"/>
+            <a:off x="1809704" y="1666091"/>
+            <a:ext cx="8775764" cy="4304403"/>
           </a:xfrm>
           <a:prstGeom prst="rect">
             <a:avLst/>
           </a:prstGeom>
-          <a:noFill/>
-          <a:ln w="12700" cap="flat" cmpd="sng">
-            <a:noFill/>
-            <a:prstDash val="solid"/>
-            <a:round/>
-          </a:ln>
         </p:spPr>
-        <p:txBody>
-          <a:bodyPr vert="horz" wrap="square" lIns="0" tIns="0" rIns="0" bIns="0" rtlCol="0" anchor="ctr" anchorCtr="0"/>
-          <a:lstStyle/>
-          <a:p>
-            <a:pPr marL="0" indent="0" algn="l">
-              <a:lnSpc>
-                <a:spcPct val="125000"/>
-              </a:lnSpc>
-              <a:defRPr/>
-            </a:pPr>
-            <a:r>
-              <a:rPr lang="en-US" sz="1600" b="1" i="0" u="none" strike="noStrike">
-                <a:solidFill>
-                  <a:srgbClr val="4ADE80"/>
-                </a:solidFill>
-                <a:latin typeface="Noto Sans SC"/>
-                <a:ea typeface="Noto Sans SC"/>
-                <a:cs typeface="Noto Sans SC"/>
-                <a:sym typeface="Noto Sans SC"/>
-              </a:rPr>
-              <a:t>专业分工：让技术优势最大化</a:t>
-            </a:r>
-            <a:endParaRPr lang="en-US" sz="1100"/>
-          </a:p>
-        </p:txBody>
-      </p:sp>
-      <p:sp>
-        <p:nvSpPr>
-          <p:cNvPr id="32" name="AutoShape 7">
-            <a:extLst>
-              <a:ext uri="{FF2B5EF4-FFF2-40B4-BE49-F238E27FC236}">
-                <a16:creationId xmlns:a16="http://schemas.microsoft.com/office/drawing/2014/main" id="{A85C06B9-C155-4E0E-AF75-C6F0DE718AF8}"/>
-              </a:ext>
-            </a:extLst>
-          </p:cNvPr>
-          <p:cNvSpPr/>
-          <p:nvPr/>
-        </p:nvSpPr>
-        <p:spPr>
-          <a:xfrm>
-            <a:off x="889000" y="2349500"/>
-            <a:ext cx="5080000" cy="508000"/>
-          </a:xfrm>
-          <a:prstGeom prst="rect">
-            <a:avLst/>
-          </a:prstGeom>
-          <a:noFill/>
-          <a:ln w="12700" cap="flat" cmpd="sng">
-            <a:noFill/>
-            <a:prstDash val="solid"/>
-            <a:round/>
-          </a:ln>
-        </p:spPr>
-        <p:txBody>
-          <a:bodyPr vert="horz" wrap="square" lIns="0" tIns="0" rIns="0" bIns="0" rtlCol="0" anchor="ctr" anchorCtr="0"/>
-          <a:lstStyle/>
-          <a:p>
-            <a:pPr marL="0" indent="0" algn="l">
-              <a:lnSpc>
-                <a:spcPct val="108333"/>
-              </a:lnSpc>
-              <a:defRPr/>
-            </a:pPr>
-            <a:r>
-              <a:rPr lang="en-US" sz="1300" b="1" i="0" u="none" strike="noStrike">
-                <a:solidFill>
-                  <a:srgbClr val="1F2937"/>
-                </a:solidFill>
-                <a:latin typeface="Noto Sans SC"/>
-                <a:ea typeface="Noto Sans SC"/>
-                <a:cs typeface="Noto Sans SC"/>
-                <a:sym typeface="Noto Sans SC"/>
-              </a:rPr>
-              <a:t>前端交互：</a:t>
-            </a:r>
-            <a:r>
-              <a:rPr lang="en-US" sz="1200" b="0" i="0" u="none" strike="noStrike">
-                <a:solidFill>
-                  <a:srgbClr val="374151"/>
-                </a:solidFill>
-                <a:latin typeface="Noto Sans SC"/>
-                <a:ea typeface="Noto Sans SC"/>
-                <a:cs typeface="Noto Sans SC"/>
-                <a:sym typeface="Noto Sans SC"/>
-              </a:rPr>
-              <a:t>选派经验丰富成员主导Vue组件开发，把控页面交互细节与用户体验流畅度。</a:t>
-            </a:r>
-            <a:endParaRPr lang="en-US" sz="1100"/>
-          </a:p>
-        </p:txBody>
-      </p:sp>
-      <p:sp>
-        <p:nvSpPr>
-          <p:cNvPr id="33" name="AutoShape 8">
-            <a:extLst>
-              <a:ext uri="{FF2B5EF4-FFF2-40B4-BE49-F238E27FC236}">
-                <a16:creationId xmlns:a16="http://schemas.microsoft.com/office/drawing/2014/main" id="{977DA81B-99F9-49DB-9C02-DD97FAD02AAB}"/>
-              </a:ext>
-            </a:extLst>
-          </p:cNvPr>
-          <p:cNvSpPr/>
-          <p:nvPr/>
-        </p:nvSpPr>
-        <p:spPr>
-          <a:xfrm>
-            <a:off x="889000" y="2984500"/>
-            <a:ext cx="5080000" cy="508000"/>
-          </a:xfrm>
-          <a:prstGeom prst="rect">
-            <a:avLst/>
-          </a:prstGeom>
-          <a:noFill/>
-          <a:ln w="12700" cap="flat" cmpd="sng">
-            <a:noFill/>
-            <a:prstDash val="solid"/>
-            <a:round/>
-          </a:ln>
-        </p:spPr>
-        <p:txBody>
-          <a:bodyPr vert="horz" wrap="square" lIns="0" tIns="0" rIns="0" bIns="0" rtlCol="0" anchor="ctr" anchorCtr="0"/>
-          <a:lstStyle/>
-          <a:p>
-            <a:pPr marL="0" indent="0" algn="l">
-              <a:lnSpc>
-                <a:spcPct val="108333"/>
-              </a:lnSpc>
-              <a:defRPr/>
-            </a:pPr>
-            <a:r>
-              <a:rPr lang="en-US" sz="1300" b="1" i="0" u="none" strike="noStrike">
-                <a:solidFill>
-                  <a:srgbClr val="1F2937"/>
-                </a:solidFill>
-                <a:latin typeface="Noto Sans SC"/>
-                <a:ea typeface="Noto Sans SC"/>
-                <a:cs typeface="Noto Sans SC"/>
-                <a:sym typeface="Noto Sans SC"/>
-              </a:rPr>
-              <a:t>核心逻辑：</a:t>
-            </a:r>
-            <a:r>
-              <a:rPr lang="en-US" sz="1200" b="0" i="0" u="none" strike="noStrike">
-                <a:solidFill>
-                  <a:srgbClr val="374151"/>
-                </a:solidFill>
-                <a:latin typeface="Noto Sans SC"/>
-                <a:ea typeface="Noto Sans SC"/>
-                <a:cs typeface="Noto Sans SC"/>
-                <a:sym typeface="Noto Sans SC"/>
-              </a:rPr>
-              <a:t>由基础扎实的骨干负责后端接口与业务逻辑，确保数据流转的稳定性与安全性。</a:t>
-            </a:r>
-            <a:endParaRPr lang="en-US" sz="1100"/>
-          </a:p>
-        </p:txBody>
-      </p:sp>
-      <p:sp>
-        <p:nvSpPr>
-          <p:cNvPr id="34" name="AutoShape 9">
-            <a:extLst>
-              <a:ext uri="{FF2B5EF4-FFF2-40B4-BE49-F238E27FC236}">
-                <a16:creationId xmlns:a16="http://schemas.microsoft.com/office/drawing/2014/main" id="{BC6BD3D0-3E3D-46FD-8B9F-486514F9AA81}"/>
-              </a:ext>
-            </a:extLst>
-          </p:cNvPr>
-          <p:cNvSpPr/>
-          <p:nvPr/>
-        </p:nvSpPr>
-        <p:spPr>
-          <a:xfrm>
-            <a:off x="889000" y="3619500"/>
-            <a:ext cx="5080000" cy="508000"/>
-          </a:xfrm>
-          <a:prstGeom prst="rect">
-            <a:avLst/>
-          </a:prstGeom>
-          <a:noFill/>
-          <a:ln w="12700" cap="flat" cmpd="sng">
-            <a:noFill/>
-            <a:prstDash val="solid"/>
-            <a:round/>
-          </a:ln>
-        </p:spPr>
-        <p:txBody>
-          <a:bodyPr vert="horz" wrap="square" lIns="0" tIns="0" rIns="0" bIns="0" rtlCol="0" anchor="ctr" anchorCtr="0"/>
-          <a:lstStyle/>
-          <a:p>
-            <a:pPr marL="0" indent="0" algn="l">
-              <a:lnSpc>
-                <a:spcPct val="108333"/>
-              </a:lnSpc>
-              <a:defRPr/>
-            </a:pPr>
-            <a:r>
-              <a:rPr lang="en-US" sz="1300" b="1" i="0" u="none" strike="noStrike">
-                <a:solidFill>
-                  <a:srgbClr val="1F2937"/>
-                </a:solidFill>
-                <a:latin typeface="Noto Sans SC"/>
-                <a:ea typeface="Noto Sans SC"/>
-                <a:cs typeface="Noto Sans SC"/>
-                <a:sym typeface="Noto Sans SC"/>
-              </a:rPr>
-              <a:t>质量保障：</a:t>
-            </a:r>
-            <a:r>
-              <a:rPr lang="en-US" sz="1200" b="0" i="0" u="none" strike="noStrike">
-                <a:solidFill>
-                  <a:srgbClr val="374151"/>
-                </a:solidFill>
-                <a:latin typeface="Noto Sans SC"/>
-                <a:ea typeface="Noto Sans SC"/>
-                <a:cs typeface="Noto Sans SC"/>
-                <a:sym typeface="Noto Sans SC"/>
-              </a:rPr>
-              <a:t>安排严谨细致的成员执行功能测试与接口文档编写，筑牢交付质量的最后一道防线。</a:t>
-            </a:r>
-            <a:endParaRPr lang="en-US" sz="1100"/>
-          </a:p>
-        </p:txBody>
-      </p:sp>
-      <p:sp>
-        <p:nvSpPr>
-          <p:cNvPr id="35" name="AutoShape 11">
-            <a:extLst>
-              <a:ext uri="{FF2B5EF4-FFF2-40B4-BE49-F238E27FC236}">
-                <a16:creationId xmlns:a16="http://schemas.microsoft.com/office/drawing/2014/main" id="{FA5600EB-ACC9-4734-8DCE-80FC127A55F6}"/>
-              </a:ext>
-            </a:extLst>
-          </p:cNvPr>
-          <p:cNvSpPr/>
-          <p:nvPr/>
-        </p:nvSpPr>
-        <p:spPr>
-          <a:xfrm>
-            <a:off x="6477000" y="1778000"/>
-            <a:ext cx="5080000" cy="304800"/>
-          </a:xfrm>
-          <a:prstGeom prst="rect">
-            <a:avLst/>
-          </a:prstGeom>
-          <a:noFill/>
-          <a:ln w="12700" cap="flat" cmpd="sng">
-            <a:noFill/>
-            <a:prstDash val="solid"/>
-            <a:round/>
-          </a:ln>
-        </p:spPr>
-        <p:txBody>
-          <a:bodyPr vert="horz" wrap="square" lIns="0" tIns="0" rIns="0" bIns="0" rtlCol="0" anchor="ctr" anchorCtr="0"/>
-          <a:lstStyle/>
-          <a:p>
-            <a:pPr marL="0" indent="0" algn="l">
-              <a:lnSpc>
-                <a:spcPct val="125000"/>
-              </a:lnSpc>
-              <a:defRPr/>
-            </a:pPr>
-            <a:r>
-              <a:rPr lang="en-US" sz="1600" b="1" i="0" u="none" strike="noStrike">
-                <a:solidFill>
-                  <a:srgbClr val="4ADE80"/>
-                </a:solidFill>
-                <a:latin typeface="Noto Sans SC"/>
-                <a:ea typeface="Noto Sans SC"/>
-                <a:cs typeface="Noto Sans SC"/>
-                <a:sym typeface="Noto Sans SC"/>
-              </a:rPr>
-              <a:t>并行开发：打破串行的效率瓶颈</a:t>
-            </a:r>
-            <a:endParaRPr lang="en-US" sz="1100"/>
-          </a:p>
-        </p:txBody>
-      </p:sp>
-      <p:sp>
-        <p:nvSpPr>
-          <p:cNvPr id="36" name="AutoShape 13">
-            <a:extLst>
-              <a:ext uri="{FF2B5EF4-FFF2-40B4-BE49-F238E27FC236}">
-                <a16:creationId xmlns:a16="http://schemas.microsoft.com/office/drawing/2014/main" id="{BC6EAE49-7DA8-4DDA-89BB-1625FA64AE4F}"/>
-              </a:ext>
-            </a:extLst>
-          </p:cNvPr>
-          <p:cNvSpPr/>
-          <p:nvPr/>
-        </p:nvSpPr>
-        <p:spPr>
-          <a:xfrm>
-            <a:off x="6477000" y="2349500"/>
-            <a:ext cx="5080000" cy="508000"/>
-          </a:xfrm>
-          <a:prstGeom prst="rect">
-            <a:avLst/>
-          </a:prstGeom>
-          <a:noFill/>
-          <a:ln w="12700" cap="flat" cmpd="sng">
-            <a:noFill/>
-            <a:prstDash val="solid"/>
-            <a:round/>
-          </a:ln>
-        </p:spPr>
-        <p:txBody>
-          <a:bodyPr vert="horz" wrap="square" lIns="0" tIns="0" rIns="0" bIns="0" rtlCol="0" anchor="ctr" anchorCtr="0"/>
-          <a:lstStyle/>
-          <a:p>
-            <a:pPr marL="0" indent="0" algn="l">
-              <a:lnSpc>
-                <a:spcPct val="108333"/>
-              </a:lnSpc>
-              <a:defRPr/>
-            </a:pPr>
-            <a:r>
-              <a:rPr lang="en-US" sz="1300" b="1" i="0" u="none" strike="noStrike">
-                <a:solidFill>
-                  <a:srgbClr val="1F2937"/>
-                </a:solidFill>
-                <a:latin typeface="Noto Sans SC"/>
-                <a:ea typeface="Noto Sans SC"/>
-                <a:cs typeface="Noto Sans SC"/>
-                <a:sym typeface="Noto Sans SC"/>
-              </a:rPr>
-              <a:t>标准先行：</a:t>
-            </a:r>
-            <a:r>
-              <a:rPr lang="en-US" sz="1200" b="0" i="0" u="none" strike="noStrike">
-                <a:solidFill>
-                  <a:srgbClr val="374151"/>
-                </a:solidFill>
-                <a:latin typeface="Noto Sans SC"/>
-                <a:ea typeface="Noto Sans SC"/>
-                <a:cs typeface="Noto Sans SC"/>
-                <a:sym typeface="Noto Sans SC"/>
-              </a:rPr>
-              <a:t>先定接口文档，后分头开发，通过统一规范实现前后端解耦，最后高效联调。</a:t>
-            </a:r>
-            <a:endParaRPr lang="en-US" sz="1100"/>
-          </a:p>
-        </p:txBody>
-      </p:sp>
-      <p:sp>
-        <p:nvSpPr>
-          <p:cNvPr id="37" name="AutoShape 14">
-            <a:extLst>
-              <a:ext uri="{FF2B5EF4-FFF2-40B4-BE49-F238E27FC236}">
-                <a16:creationId xmlns:a16="http://schemas.microsoft.com/office/drawing/2014/main" id="{9BA04F73-4319-4162-914E-58A6519FAF38}"/>
-              </a:ext>
-            </a:extLst>
-          </p:cNvPr>
-          <p:cNvSpPr/>
-          <p:nvPr/>
-        </p:nvSpPr>
-        <p:spPr>
-          <a:xfrm>
-            <a:off x="6477000" y="2984500"/>
-            <a:ext cx="5080000" cy="508000"/>
-          </a:xfrm>
-          <a:prstGeom prst="rect">
-            <a:avLst/>
-          </a:prstGeom>
-          <a:noFill/>
-          <a:ln w="12700" cap="flat" cmpd="sng">
-            <a:noFill/>
-            <a:prstDash val="solid"/>
-            <a:round/>
-          </a:ln>
-        </p:spPr>
-        <p:txBody>
-          <a:bodyPr vert="horz" wrap="square" lIns="0" tIns="0" rIns="0" bIns="0" rtlCol="0" anchor="ctr" anchorCtr="0"/>
-          <a:lstStyle/>
-          <a:p>
-            <a:pPr marL="0" indent="0" algn="l">
-              <a:lnSpc>
-                <a:spcPct val="108333"/>
-              </a:lnSpc>
-              <a:defRPr/>
-            </a:pPr>
-            <a:r>
-              <a:rPr lang="en-US" sz="1300" b="1" i="0" u="none" strike="noStrike">
-                <a:solidFill>
-                  <a:srgbClr val="1F2937"/>
-                </a:solidFill>
-                <a:latin typeface="Noto Sans SC"/>
-                <a:ea typeface="Noto Sans SC"/>
-                <a:cs typeface="Noto Sans SC"/>
-                <a:sym typeface="Noto Sans SC"/>
-              </a:rPr>
-              <a:t>重心聚焦：</a:t>
-            </a:r>
-            <a:r>
-              <a:rPr lang="en-US" sz="1200" b="0" i="0" u="none" strike="noStrike">
-                <a:solidFill>
-                  <a:srgbClr val="374151"/>
-                </a:solidFill>
-                <a:latin typeface="Noto Sans SC"/>
-                <a:ea typeface="Noto Sans SC"/>
-                <a:cs typeface="Noto Sans SC"/>
-                <a:sym typeface="Noto Sans SC"/>
-              </a:rPr>
-              <a:t>优先攻克计算引擎等核心功能，确保业务基石稳固，非核心功能迭代后置。</a:t>
-            </a:r>
-            <a:endParaRPr lang="en-US" sz="1100"/>
-          </a:p>
-        </p:txBody>
-      </p:sp>
-      <p:sp>
-        <p:nvSpPr>
-          <p:cNvPr id="38" name="AutoShape 15">
-            <a:extLst>
-              <a:ext uri="{FF2B5EF4-FFF2-40B4-BE49-F238E27FC236}">
-                <a16:creationId xmlns:a16="http://schemas.microsoft.com/office/drawing/2014/main" id="{5ACA5B75-6182-4D36-857A-ACBC5529D103}"/>
-              </a:ext>
-            </a:extLst>
-          </p:cNvPr>
-          <p:cNvSpPr/>
-          <p:nvPr/>
-        </p:nvSpPr>
-        <p:spPr>
-          <a:xfrm>
-            <a:off x="6477000" y="3619500"/>
-            <a:ext cx="5080000" cy="508000"/>
-          </a:xfrm>
-          <a:prstGeom prst="rect">
-            <a:avLst/>
-          </a:prstGeom>
-          <a:noFill/>
-          <a:ln w="12700" cap="flat" cmpd="sng">
-            <a:noFill/>
-            <a:prstDash val="solid"/>
-            <a:round/>
-          </a:ln>
-        </p:spPr>
-        <p:txBody>
-          <a:bodyPr vert="horz" wrap="square" lIns="0" tIns="0" rIns="0" bIns="0" rtlCol="0" anchor="ctr" anchorCtr="0"/>
-          <a:lstStyle/>
-          <a:p>
-            <a:pPr marL="0" indent="0" algn="l">
-              <a:lnSpc>
-                <a:spcPct val="108333"/>
-              </a:lnSpc>
-              <a:defRPr/>
-            </a:pPr>
-            <a:r>
-              <a:rPr lang="en-US" sz="1300" b="1" i="0" u="none" strike="noStrike">
-                <a:solidFill>
-                  <a:srgbClr val="1F2937"/>
-                </a:solidFill>
-                <a:latin typeface="Noto Sans SC"/>
-                <a:ea typeface="Noto Sans SC"/>
-                <a:cs typeface="Noto Sans SC"/>
-                <a:sym typeface="Noto Sans SC"/>
-              </a:rPr>
-              <a:t>进度同步：</a:t>
-            </a:r>
-            <a:r>
-              <a:rPr lang="en-US" sz="1200" b="0" i="0" u="none" strike="noStrike">
-                <a:solidFill>
-                  <a:srgbClr val="374151"/>
-                </a:solidFill>
-                <a:latin typeface="Noto Sans SC"/>
-                <a:ea typeface="Noto Sans SC"/>
-                <a:cs typeface="Noto Sans SC"/>
-                <a:sym typeface="Noto Sans SC"/>
-              </a:rPr>
-              <a:t>每日站会对齐进度，及时消除阻塞点，保持开发节奏一致，避免“一人拖全队”。</a:t>
-            </a:r>
-            <a:endParaRPr lang="en-US" sz="1100"/>
-          </a:p>
-        </p:txBody>
-      </p:sp>
+      </p:pic>
     </p:spTree>
     <p:extLst>
       <p:ext uri="{BB962C8B-B14F-4D97-AF65-F5344CB8AC3E}">

--- a/PPT/开源软件通识-第十八周汇报.pptx
+++ b/PPT/开源软件通识-第十八周汇报.pptx
@@ -5,21 +5,23 @@
     <p:sldMasterId id="2147483648" r:id="rId1"/>
   </p:sldMasterIdLst>
   <p:notesMasterIdLst>
-    <p:notesMasterId r:id="rId9"/>
+    <p:notesMasterId r:id="rId11"/>
   </p:notesMasterIdLst>
   <p:sldIdLst>
     <p:sldId id="639" r:id="rId2"/>
     <p:sldId id="702" r:id="rId3"/>
-    <p:sldId id="866" r:id="rId4"/>
-    <p:sldId id="905" r:id="rId5"/>
+    <p:sldId id="905" r:id="rId4"/>
+    <p:sldId id="866" r:id="rId5"/>
     <p:sldId id="906" r:id="rId6"/>
     <p:sldId id="908" r:id="rId7"/>
-    <p:sldId id="716" r:id="rId8"/>
+    <p:sldId id="909" r:id="rId8"/>
+    <p:sldId id="910" r:id="rId9"/>
+    <p:sldId id="716" r:id="rId10"/>
   </p:sldIdLst>
   <p:sldSz cx="12192000" cy="6858000"/>
   <p:notesSz cx="6858000" cy="9144000"/>
   <p:custDataLst>
-    <p:tags r:id="rId10"/>
+    <p:tags r:id="rId12"/>
   </p:custDataLst>
   <p:defaultTextStyle>
     <a:defPPr>
@@ -123,10 +125,12 @@
           <p14:sldIdLst>
             <p14:sldId id="639"/>
             <p14:sldId id="702"/>
+            <p14:sldId id="905"/>
             <p14:sldId id="866"/>
-            <p14:sldId id="905"/>
             <p14:sldId id="906"/>
             <p14:sldId id="908"/>
+            <p14:sldId id="909"/>
+            <p14:sldId id="910"/>
             <p14:sldId id="716"/>
           </p14:sldIdLst>
         </p14:section>
@@ -238,7 +242,7 @@
           <a:p>
             <a:fld id="{7B469C68-B96B-4B00-A936-4ED691395EEA}" type="datetimeFigureOut">
               <a:rPr lang="zh-CN" altLang="en-US" smtClean="0"/>
-              <a:t>2026/6/23</a:t>
+              <a:t>2026/6/26</a:t>
             </a:fld>
             <a:endParaRPr lang="zh-CN" altLang="en-US" dirty="0"/>
           </a:p>
@@ -720,22 +724,10 @@
           <a:bodyPr/>
           <a:lstStyle/>
           <a:p>
-            <a:pPr marL="0" marR="0" lvl="0" indent="0" algn="l" defTabSz="914400" rtl="0" eaLnBrk="1" fontAlgn="auto" latinLnBrk="0" hangingPunct="1">
+            <a:pPr marL="0" indent="0" algn="l">
               <a:lnSpc>
                 <a:spcPct val="100000"/>
               </a:lnSpc>
-              <a:spcBef>
-                <a:spcPts val="0"/>
-              </a:spcBef>
-              <a:spcAft>
-                <a:spcPts val="0"/>
-              </a:spcAft>
-              <a:buClrTx/>
-              <a:buSzTx/>
-              <a:buFontTx/>
-              <a:buNone/>
-              <a:tabLst/>
-              <a:defRPr/>
             </a:pPr>
             <a:r>
               <a:rPr lang="en-US" altLang="zh-CN" sz="1200" b="0" i="0" u="none" strike="noStrike">
@@ -743,29 +735,8 @@
                   <a:srgbClr val="000000"/>
                 </a:solidFill>
               </a:rPr>
-              <a:t>在技术能力方面，最大的收获是建立了全栈视角。通过审查前后端代码，我不再局限于自己负责的模块，而是能够理解整个系统的交互流程。比如对于项目核心的三级计算引擎和权重归一化等复杂业务，我也通过代码审查，理清了其内在逻辑。</a:t>
+              <a:t>在代码质量把控方面，Code Review制度让我受益匪浅。通过审查他人代码，我学会了识别常见的安全风险，比如SQL注入和敏感信息泄露，并推动团队采用更安全的编码方式。同时，我也意识到统一代码规范的重要性，包括命名、注释和分层结构。这让我深刻体会到，优秀的代码不仅要能实现功能，更要具备良好的可读性、可维护性和安全性。</a:t>
             </a:r>
-          </a:p>
-          <a:p>
-            <a:pPr marL="0" marR="0" indent="0" algn="l" defTabSz="914400" rtl="0" eaLnBrk="1" fontAlgn="auto" latinLnBrk="0" hangingPunct="1">
-              <a:lnSpc>
-                <a:spcPct val="100000"/>
-              </a:lnSpc>
-              <a:spcBef>
-                <a:spcPts val="0"/>
-              </a:spcBef>
-              <a:spcAft>
-                <a:spcPts val="0"/>
-              </a:spcAft>
-              <a:buClrTx/>
-              <a:buSzTx/>
-              <a:buFontTx/>
-              <a:buNone/>
-              <a:defRPr/>
-            </a:pPr>
-            <a:endParaRPr lang="zh-CN" altLang="en-US" sz="1200">
-              <a:latin typeface="+mn-ea"/>
-            </a:endParaRPr>
           </a:p>
         </p:txBody>
       </p:sp>
@@ -793,6 +764,11 @@
         </p:txBody>
       </p:sp>
     </p:spTree>
+    <p:extLst>
+      <p:ext uri="{BB962C8B-B14F-4D97-AF65-F5344CB8AC3E}">
+        <p14:creationId xmlns:p14="http://schemas.microsoft.com/office/powerpoint/2010/main" val="2063464508"/>
+      </p:ext>
+    </p:extLst>
   </p:cSld>
   <p:clrMapOvr>
     <a:masterClrMapping/>
@@ -844,18 +820,27 @@
           <a:bodyPr/>
           <a:lstStyle/>
           <a:p>
-            <a:pPr marL="0" indent="0" algn="l">
+            <a:pPr marL="0" marR="0" indent="0" algn="l" defTabSz="914400" rtl="0" eaLnBrk="1" fontAlgn="auto" latinLnBrk="0" hangingPunct="1">
               <a:lnSpc>
                 <a:spcPct val="100000"/>
               </a:lnSpc>
+              <a:spcBef>
+                <a:spcPts val="0"/>
+              </a:spcBef>
+              <a:spcAft>
+                <a:spcPts val="0"/>
+              </a:spcAft>
+              <a:buClrTx/>
+              <a:buSzTx/>
+              <a:buFontTx/>
+              <a:buNone/>
+              <a:defRPr/>
             </a:pPr>
             <a:r>
-              <a:rPr lang="en-US" altLang="zh-CN" sz="1200" b="0" i="0" u="none" strike="noStrike">
-                <a:solidFill>
-                  <a:srgbClr val="000000"/>
-                </a:solidFill>
+              <a:rPr lang="zh-CN" altLang="en-US" sz="1200">
+                <a:latin typeface="+mn-ea"/>
               </a:rPr>
-              <a:t>在代码质量把控方面，Code Review制度让我受益匪浅。通过审查他人代码，我学会了识别常见的安全风险，比如SQL注入和敏感信息泄露，并推动团队采用更安全的编码方式。同时，我也意识到统一代码规范的重要性，包括命名、注释和分层结构。这让我深刻体会到，优秀的代码不仅要能实现功能，更要具备良好的可读性、可维护性和安全性。</a:t>
+              <a:t>部署这一块在此之前我没有接触过的。</a:t>
             </a:r>
           </a:p>
         </p:txBody>
@@ -884,11 +869,6 @@
         </p:txBody>
       </p:sp>
     </p:spTree>
-    <p:extLst>
-      <p:ext uri="{BB962C8B-B14F-4D97-AF65-F5344CB8AC3E}">
-        <p14:creationId xmlns:p14="http://schemas.microsoft.com/office/powerpoint/2010/main" val="2063464508"/>
-      </p:ext>
-    </p:extLst>
   </p:cSld>
   <p:clrMapOvr>
     <a:masterClrMapping/>
@@ -951,7 +931,7 @@
                   <a:srgbClr val="000000"/>
                 </a:solidFill>
               </a:rPr>
-              <a:t>接下来是团队管理方面的收获。首先是任务分解与分配。面对一个8人团队，我学会了根据成员的技术特长来分配任务，让专业的人做专业的事。同时，我规划了前后端并行开发的流程，先定义接口，再分头工作，大大提高了开发效率。这个过程让我明白，一个优秀的组长，首先要懂得如何合理地拆分和分配任务，才能激发团队的最大潜能。</a:t>
+              <a:t>接下来是团队管理方面的收获。首先是任务分解与分配。面对一个8人团队，我学会了根据成员的技术特长来分配任务，让专业的人做专业的事。</a:t>
             </a:r>
           </a:p>
         </p:txBody>
@@ -1156,6 +1136,350 @@
           <a:bodyPr/>
           <a:lstStyle/>
           <a:p>
+            <a:pPr algn="l" fontAlgn="base">
+              <a:buFont typeface="Arial" panose="020B0604020202020204" pitchFamily="34" charset="0"/>
+              <a:buChar char="•"/>
+            </a:pPr>
+            <a:r>
+              <a:rPr lang="zh-CN" altLang="en-US" b="0" i="0">
+                <a:effectLst/>
+                <a:latin typeface="inherit"/>
+              </a:rPr>
+              <a:t>点击左下角状态栏的当前分支名，可快速：</a:t>
+            </a:r>
+          </a:p>
+          <a:p>
+            <a:pPr marL="742950" lvl="1" indent="-285750" algn="l" fontAlgn="base">
+              <a:buFont typeface="Arial" panose="020B0604020202020204" pitchFamily="34" charset="0"/>
+              <a:buChar char="•"/>
+            </a:pPr>
+            <a:r>
+              <a:rPr lang="zh-CN" altLang="en-US" b="0" i="0">
+                <a:effectLst/>
+                <a:latin typeface="inherit"/>
+              </a:rPr>
+              <a:t>切换分支</a:t>
+            </a:r>
+          </a:p>
+          <a:p>
+            <a:pPr marL="742950" lvl="1" indent="-285750" algn="l" fontAlgn="base">
+              <a:buFont typeface="Arial" panose="020B0604020202020204" pitchFamily="34" charset="0"/>
+              <a:buChar char="•"/>
+            </a:pPr>
+            <a:r>
+              <a:rPr lang="zh-CN" altLang="en-US" b="0" i="0">
+                <a:effectLst/>
+                <a:latin typeface="inherit"/>
+              </a:rPr>
+              <a:t>创建新分支</a:t>
+            </a:r>
+          </a:p>
+          <a:p>
+            <a:pPr marL="742950" lvl="1" indent="-285750" algn="l" fontAlgn="base">
+              <a:buFont typeface="Arial" panose="020B0604020202020204" pitchFamily="34" charset="0"/>
+              <a:buChar char="•"/>
+            </a:pPr>
+            <a:r>
+              <a:rPr lang="zh-CN" altLang="en-US" b="0" i="0">
+                <a:effectLst/>
+                <a:latin typeface="inherit"/>
+              </a:rPr>
+              <a:t>合并分支</a:t>
+            </a:r>
+          </a:p>
+          <a:p>
+            <a:pPr marL="742950" lvl="1" indent="-285750" algn="l" fontAlgn="base">
+              <a:buFont typeface="Arial" panose="020B0604020202020204" pitchFamily="34" charset="0"/>
+              <a:buChar char="•"/>
+            </a:pPr>
+            <a:r>
+              <a:rPr lang="zh-CN" altLang="en-US" b="0" i="0">
+                <a:effectLst/>
+                <a:latin typeface="inherit"/>
+              </a:rPr>
+              <a:t>拉取</a:t>
+            </a:r>
+            <a:r>
+              <a:rPr lang="en-US" altLang="zh-CN" b="0" i="0">
+                <a:effectLst/>
+                <a:latin typeface="inherit"/>
+              </a:rPr>
+              <a:t>/</a:t>
+            </a:r>
+            <a:r>
+              <a:rPr lang="zh-CN" altLang="en-US" b="0" i="0">
+                <a:effectLst/>
+                <a:latin typeface="inherit"/>
+              </a:rPr>
+              <a:t>推送</a:t>
+            </a:r>
+          </a:p>
+          <a:p>
+            <a:pPr marL="0" indent="0" algn="l">
+              <a:lnSpc>
+                <a:spcPct val="100000"/>
+              </a:lnSpc>
+            </a:pPr>
+            <a:endParaRPr lang="en-US" altLang="zh-CN" sz="1200" b="0" i="0" u="none" strike="noStrike">
+              <a:solidFill>
+                <a:srgbClr val="000000"/>
+              </a:solidFill>
+            </a:endParaRPr>
+          </a:p>
+        </p:txBody>
+      </p:sp>
+      <p:sp>
+        <p:nvSpPr>
+          <p:cNvPr id="4" name="灯片编号占位符 3"/>
+          <p:cNvSpPr>
+            <a:spLocks noGrp="1"/>
+          </p:cNvSpPr>
+          <p:nvPr>
+            <p:ph type="sldNum" sz="quarter" idx="10"/>
+          </p:nvPr>
+        </p:nvSpPr>
+        <p:spPr/>
+        <p:txBody>
+          <a:bodyPr/>
+          <a:lstStyle/>
+          <a:p>
+            <a:fld id="{78957953-4CC8-4E4A-AD2D-7A5A0B36E814}" type="slidenum">
+              <a:rPr lang="zh-CN" altLang="en-US" smtClean="0"/>
+              <a:t>7</a:t>
+            </a:fld>
+            <a:endParaRPr lang="zh-CN" altLang="en-US" dirty="0"/>
+          </a:p>
+        </p:txBody>
+      </p:sp>
+    </p:spTree>
+    <p:extLst>
+      <p:ext uri="{BB962C8B-B14F-4D97-AF65-F5344CB8AC3E}">
+        <p14:creationId xmlns:p14="http://schemas.microsoft.com/office/powerpoint/2010/main" val="4112848941"/>
+      </p:ext>
+    </p:extLst>
+  </p:cSld>
+  <p:clrMapOvr>
+    <a:masterClrMapping/>
+  </p:clrMapOvr>
+</p:notes>
+</file>
+
+<file path=ppt/notesSlides/notesSlide8.xml><?xml version="1.0" encoding="utf-8"?>
+<p:notes xmlns:a="http://schemas.openxmlformats.org/drawingml/2006/main" xmlns:r="http://schemas.openxmlformats.org/officeDocument/2006/relationships" xmlns:p="http://schemas.openxmlformats.org/presentationml/2006/main">
+  <p:cSld>
+    <p:spTree>
+      <p:nvGrpSpPr>
+        <p:cNvPr id="1" name=""/>
+        <p:cNvGrpSpPr/>
+        <p:nvPr/>
+      </p:nvGrpSpPr>
+      <p:grpSpPr>
+        <a:xfrm>
+          <a:off x="0" y="0"/>
+          <a:ext cx="0" cy="0"/>
+          <a:chOff x="0" y="0"/>
+          <a:chExt cx="0" cy="0"/>
+        </a:xfrm>
+      </p:grpSpPr>
+      <p:sp>
+        <p:nvSpPr>
+          <p:cNvPr id="2" name="幻灯片图像占位符 1"/>
+          <p:cNvSpPr>
+            <a:spLocks noGrp="1" noRot="1" noChangeAspect="1"/>
+          </p:cNvSpPr>
+          <p:nvPr>
+            <p:ph type="sldImg"/>
+          </p:nvPr>
+        </p:nvSpPr>
+        <p:spPr/>
+      </p:sp>
+      <p:sp>
+        <p:nvSpPr>
+          <p:cNvPr id="3" name="备注占位符 2"/>
+          <p:cNvSpPr>
+            <a:spLocks noGrp="1"/>
+          </p:cNvSpPr>
+          <p:nvPr>
+            <p:ph type="body" idx="1"/>
+          </p:nvPr>
+        </p:nvSpPr>
+        <p:spPr/>
+        <p:txBody>
+          <a:bodyPr/>
+          <a:lstStyle/>
+          <a:p>
+            <a:pPr algn="l" fontAlgn="base">
+              <a:buFont typeface="Arial" panose="020B0604020202020204" pitchFamily="34" charset="0"/>
+              <a:buChar char="•"/>
+            </a:pPr>
+            <a:r>
+              <a:rPr lang="zh-CN" altLang="en-US" b="0" i="0">
+                <a:effectLst/>
+                <a:latin typeface="inherit"/>
+              </a:rPr>
+              <a:t>点击左下角状态栏的当前分支名，可快速：</a:t>
+            </a:r>
+          </a:p>
+          <a:p>
+            <a:pPr marL="742950" lvl="1" indent="-285750" algn="l" fontAlgn="base">
+              <a:buFont typeface="Arial" panose="020B0604020202020204" pitchFamily="34" charset="0"/>
+              <a:buChar char="•"/>
+            </a:pPr>
+            <a:r>
+              <a:rPr lang="zh-CN" altLang="en-US" b="0" i="0">
+                <a:effectLst/>
+                <a:latin typeface="inherit"/>
+              </a:rPr>
+              <a:t>切换分支</a:t>
+            </a:r>
+          </a:p>
+          <a:p>
+            <a:pPr marL="742950" lvl="1" indent="-285750" algn="l" fontAlgn="base">
+              <a:buFont typeface="Arial" panose="020B0604020202020204" pitchFamily="34" charset="0"/>
+              <a:buChar char="•"/>
+            </a:pPr>
+            <a:r>
+              <a:rPr lang="zh-CN" altLang="en-US" b="0" i="0">
+                <a:effectLst/>
+                <a:latin typeface="inherit"/>
+              </a:rPr>
+              <a:t>创建新分支</a:t>
+            </a:r>
+          </a:p>
+          <a:p>
+            <a:pPr marL="742950" lvl="1" indent="-285750" algn="l" fontAlgn="base">
+              <a:buFont typeface="Arial" panose="020B0604020202020204" pitchFamily="34" charset="0"/>
+              <a:buChar char="•"/>
+            </a:pPr>
+            <a:r>
+              <a:rPr lang="zh-CN" altLang="en-US" b="0" i="0">
+                <a:effectLst/>
+                <a:latin typeface="inherit"/>
+              </a:rPr>
+              <a:t>合并分支</a:t>
+            </a:r>
+          </a:p>
+          <a:p>
+            <a:pPr marL="742950" lvl="1" indent="-285750" algn="l" fontAlgn="base">
+              <a:buFont typeface="Arial" panose="020B0604020202020204" pitchFamily="34" charset="0"/>
+              <a:buChar char="•"/>
+            </a:pPr>
+            <a:r>
+              <a:rPr lang="zh-CN" altLang="en-US" b="0" i="0">
+                <a:effectLst/>
+                <a:latin typeface="inherit"/>
+              </a:rPr>
+              <a:t>拉取</a:t>
+            </a:r>
+            <a:r>
+              <a:rPr lang="en-US" altLang="zh-CN" b="0" i="0">
+                <a:effectLst/>
+                <a:latin typeface="inherit"/>
+              </a:rPr>
+              <a:t>/</a:t>
+            </a:r>
+            <a:r>
+              <a:rPr lang="zh-CN" altLang="en-US" b="0" i="0">
+                <a:effectLst/>
+                <a:latin typeface="inherit"/>
+              </a:rPr>
+              <a:t>推送</a:t>
+            </a:r>
+          </a:p>
+          <a:p>
+            <a:pPr marL="0" indent="0" algn="l">
+              <a:lnSpc>
+                <a:spcPct val="100000"/>
+              </a:lnSpc>
+            </a:pPr>
+            <a:endParaRPr lang="en-US" altLang="zh-CN" sz="1200" b="0" i="0" u="none" strike="noStrike">
+              <a:solidFill>
+                <a:srgbClr val="000000"/>
+              </a:solidFill>
+            </a:endParaRPr>
+          </a:p>
+        </p:txBody>
+      </p:sp>
+      <p:sp>
+        <p:nvSpPr>
+          <p:cNvPr id="4" name="灯片编号占位符 3"/>
+          <p:cNvSpPr>
+            <a:spLocks noGrp="1"/>
+          </p:cNvSpPr>
+          <p:nvPr>
+            <p:ph type="sldNum" sz="quarter" idx="10"/>
+          </p:nvPr>
+        </p:nvSpPr>
+        <p:spPr/>
+        <p:txBody>
+          <a:bodyPr/>
+          <a:lstStyle/>
+          <a:p>
+            <a:fld id="{78957953-4CC8-4E4A-AD2D-7A5A0B36E814}" type="slidenum">
+              <a:rPr lang="zh-CN" altLang="en-US" smtClean="0"/>
+              <a:t>8</a:t>
+            </a:fld>
+            <a:endParaRPr lang="zh-CN" altLang="en-US" dirty="0"/>
+          </a:p>
+        </p:txBody>
+      </p:sp>
+    </p:spTree>
+    <p:extLst>
+      <p:ext uri="{BB962C8B-B14F-4D97-AF65-F5344CB8AC3E}">
+        <p14:creationId xmlns:p14="http://schemas.microsoft.com/office/powerpoint/2010/main" val="3662727430"/>
+      </p:ext>
+    </p:extLst>
+  </p:cSld>
+  <p:clrMapOvr>
+    <a:masterClrMapping/>
+  </p:clrMapOvr>
+</p:notes>
+</file>
+
+<file path=ppt/notesSlides/notesSlide9.xml><?xml version="1.0" encoding="utf-8"?>
+<p:notes xmlns:a="http://schemas.openxmlformats.org/drawingml/2006/main" xmlns:r="http://schemas.openxmlformats.org/officeDocument/2006/relationships" xmlns:p="http://schemas.openxmlformats.org/presentationml/2006/main">
+  <p:cSld>
+    <p:spTree>
+      <p:nvGrpSpPr>
+        <p:cNvPr id="1" name=""/>
+        <p:cNvGrpSpPr/>
+        <p:nvPr/>
+      </p:nvGrpSpPr>
+      <p:grpSpPr>
+        <a:xfrm>
+          <a:off x="0" y="0"/>
+          <a:ext cx="0" cy="0"/>
+          <a:chOff x="0" y="0"/>
+          <a:chExt cx="0" cy="0"/>
+        </a:xfrm>
+      </p:grpSpPr>
+      <p:sp>
+        <p:nvSpPr>
+          <p:cNvPr id="2" name="幻灯片图像占位符 1"/>
+          <p:cNvSpPr>
+            <a:spLocks noGrp="1" noRot="1" noChangeAspect="1"/>
+          </p:cNvSpPr>
+          <p:nvPr>
+            <p:ph type="sldImg"/>
+          </p:nvPr>
+        </p:nvSpPr>
+        <p:spPr/>
+      </p:sp>
+      <p:sp>
+        <p:nvSpPr>
+          <p:cNvPr id="3" name="备注占位符 2"/>
+          <p:cNvSpPr>
+            <a:spLocks noGrp="1"/>
+          </p:cNvSpPr>
+          <p:nvPr>
+            <p:ph type="body" idx="1"/>
+          </p:nvPr>
+        </p:nvSpPr>
+        <p:spPr/>
+        <p:txBody>
+          <a:bodyPr/>
+          <a:lstStyle/>
+          <a:p>
             <a:endParaRPr lang="zh-CN" altLang="en-US" dirty="0"/>
           </a:p>
         </p:txBody>
@@ -1177,7 +1501,7 @@
           <a:p>
             <a:fld id="{78957953-4CC8-4E4A-AD2D-7A5A0B36E814}" type="slidenum">
               <a:rPr lang="zh-CN" altLang="en-US" smtClean="0"/>
-              <a:t>7</a:t>
+              <a:t>9</a:t>
             </a:fld>
             <a:endParaRPr lang="zh-CN" altLang="en-US" dirty="0"/>
           </a:p>
@@ -1878,7 +2202,7 @@
           <a:p>
             <a:fld id="{A5BA3452-3CC8-4E8B-993B-C9E13B0C4846}" type="datetime1">
               <a:rPr lang="zh-CN" altLang="en-US" smtClean="0"/>
-              <a:t>2026/6/23</a:t>
+              <a:t>2026/6/26</a:t>
             </a:fld>
             <a:endParaRPr lang="zh-CN" altLang="en-US"/>
           </a:p>
@@ -2919,9 +3243,9 @@
               <a:rPr lang="zh-CN" altLang="en-US" b="1">
                 <a:latin typeface="+mn-ea"/>
               </a:rPr>
-              <a:t>查琪乐、褚茂誉、邱嘉堃</a:t>
+              <a:t>查琪乐</a:t>
             </a:r>
-            <a:endParaRPr lang="en-US" altLang="zh-CN" sz="1800" b="1">
+            <a:endParaRPr lang="en-US" altLang="zh-CN" b="1">
               <a:latin typeface="+mn-ea"/>
             </a:endParaRPr>
           </a:p>
@@ -4575,18 +4899,6 @@
           <a:lstStyle/>
           <a:p>
             <a:r>
-              <a:rPr>
-                <a:sym typeface="+mn-lt"/>
-              </a:rPr>
-              <a:t>查琪乐</a:t>
-            </a:r>
-            <a:r>
-              <a:rPr lang="en-US">
-                <a:sym typeface="+mn-lt"/>
-              </a:rPr>
-              <a:t>-</a:t>
-            </a:r>
-            <a:r>
               <a:rPr lang="zh-CN" altLang="en-US">
                 <a:sym typeface="+mn-lt"/>
               </a:rPr>
@@ -4647,523 +4959,6 @@
           </a:bodyPr>
           <a:lstStyle/>
           <a:p>
-            <a:r>
-              <a:rPr lang="zh-CN" altLang="en-US" sz="2800">
-                <a:solidFill>
-                  <a:schemeClr val="bg1"/>
-                </a:solidFill>
-                <a:effectLst>
-                  <a:outerShdw blurRad="38100" dist="38100" dir="2700000" algn="tl">
-                    <a:srgbClr val="000000">
-                      <a:alpha val="43137"/>
-                    </a:srgbClr>
-                  </a:outerShdw>
-                </a:effectLst>
-                <a:latin typeface="+mn-lt"/>
-                <a:ea typeface="+mn-ea"/>
-                <a:cs typeface="+mn-ea"/>
-                <a:sym typeface="+mn-lt"/>
-              </a:rPr>
-              <a:t>查琪乐</a:t>
-            </a:r>
-            <a:r>
-              <a:rPr lang="en-US" altLang="zh-CN" sz="2800">
-                <a:solidFill>
-                  <a:schemeClr val="bg1"/>
-                </a:solidFill>
-                <a:effectLst>
-                  <a:outerShdw blurRad="38100" dist="38100" dir="2700000" algn="tl">
-                    <a:srgbClr val="000000">
-                      <a:alpha val="43137"/>
-                    </a:srgbClr>
-                  </a:outerShdw>
-                </a:effectLst>
-                <a:latin typeface="+mn-lt"/>
-                <a:ea typeface="+mn-ea"/>
-                <a:cs typeface="+mn-ea"/>
-                <a:sym typeface="+mn-lt"/>
-              </a:rPr>
-              <a:t>-</a:t>
-            </a:r>
-            <a:r>
-              <a:rPr lang="en-US" altLang="zh-CN" sz="2800" b="1" i="0" u="none" strike="noStrike">
-                <a:solidFill>
-                  <a:srgbClr val="1F2937"/>
-                </a:solidFill>
-                <a:latin typeface="Noto Sans SC"/>
-                <a:ea typeface="Noto Sans SC"/>
-                <a:cs typeface="Noto Sans SC"/>
-                <a:sym typeface="Noto Sans SC"/>
-              </a:rPr>
-              <a:t> </a:t>
-            </a:r>
-            <a:r>
-              <a:rPr lang="en-US" altLang="zh-CN">
-                <a:sym typeface="Noto Sans SC"/>
-              </a:rPr>
-              <a:t>部署与运维能力</a:t>
-            </a:r>
-            <a:endParaRPr lang="zh-CN" altLang="en-US">
-              <a:sym typeface="+mn-lt"/>
-            </a:endParaRPr>
-          </a:p>
-        </p:txBody>
-      </p:sp>
-      <p:sp>
-        <p:nvSpPr>
-          <p:cNvPr id="2" name="powerpoint template design by DAJU_PPT正版来源小红书大橘PPT微信DAJU_PPT请勿抄袭搬运！盗版必究！"/>
-          <p:cNvSpPr>
-            <a:spLocks noGrp="1"/>
-          </p:cNvSpPr>
-          <p:nvPr>
-            <p:ph type="sldNum" sz="quarter" idx="4"/>
-          </p:nvPr>
-        </p:nvSpPr>
-        <p:spPr/>
-        <p:txBody>
-          <a:bodyPr/>
-          <a:lstStyle/>
-          <a:p>
-            <a:fld id="{41DDFDCD-830D-4E78-9097-B6B92A67D61F}" type="slidenum">
-              <a:rPr lang="zh-CN" altLang="en-US" smtClean="0"/>
-              <a:t>3</a:t>
-            </a:fld>
-            <a:endParaRPr lang="zh-CN" altLang="en-US"/>
-          </a:p>
-        </p:txBody>
-      </p:sp>
-      <p:pic>
-        <p:nvPicPr>
-          <p:cNvPr id="5" name="图片 4"/>
-          <p:cNvPicPr>
-            <a:picLocks noChangeAspect="1"/>
-          </p:cNvPicPr>
-          <p:nvPr/>
-        </p:nvPicPr>
-        <p:blipFill>
-          <a:blip r:embed="rId3">
-            <a:extLst>
-              <a:ext uri="{28A0092B-C50C-407E-A947-70E740481C1C}">
-                <a14:useLocalDpi xmlns:a14="http://schemas.microsoft.com/office/drawing/2010/main" val="0"/>
-              </a:ext>
-            </a:extLst>
-          </a:blip>
-          <a:stretch>
-            <a:fillRect/>
-          </a:stretch>
-        </p:blipFill>
-        <p:spPr>
-          <a:xfrm>
-            <a:off x="8282580" y="88496"/>
-            <a:ext cx="4459272" cy="676502"/>
-          </a:xfrm>
-          <a:prstGeom prst="rect">
-            <a:avLst/>
-          </a:prstGeom>
-        </p:spPr>
-      </p:pic>
-      <p:sp>
-        <p:nvSpPr>
-          <p:cNvPr id="13" name="AutoShape 7">
-            <a:extLst>
-              <a:ext uri="{FF2B5EF4-FFF2-40B4-BE49-F238E27FC236}">
-                <a16:creationId xmlns:a16="http://schemas.microsoft.com/office/drawing/2014/main" id="{46438921-8176-4787-B94F-BA83D99C8F14}"/>
-              </a:ext>
-            </a:extLst>
-          </p:cNvPr>
-          <p:cNvSpPr/>
-          <p:nvPr/>
-        </p:nvSpPr>
-        <p:spPr>
-          <a:xfrm>
-            <a:off x="889000" y="1257572"/>
-            <a:ext cx="3302000" cy="304800"/>
-          </a:xfrm>
-          <a:prstGeom prst="rect">
-            <a:avLst/>
-          </a:prstGeom>
-          <a:noFill/>
-          <a:ln w="12700" cap="flat" cmpd="sng">
-            <a:noFill/>
-            <a:prstDash val="solid"/>
-            <a:round/>
-          </a:ln>
-        </p:spPr>
-        <p:txBody>
-          <a:bodyPr vert="horz" wrap="square" lIns="0" tIns="0" rIns="0" bIns="0" rtlCol="0" anchor="ctr" anchorCtr="0"/>
-          <a:lstStyle/>
-          <a:p>
-            <a:pPr marL="0" indent="0" algn="l">
-              <a:lnSpc>
-                <a:spcPct val="125000"/>
-              </a:lnSpc>
-              <a:defRPr/>
-            </a:pPr>
-            <a:r>
-              <a:rPr lang="en-US" sz="2000" b="1" i="0" u="none" strike="noStrike">
-                <a:solidFill>
-                  <a:srgbClr val="1F2937"/>
-                </a:solidFill>
-                <a:latin typeface="Noto Sans SC"/>
-                <a:ea typeface="Noto Sans SC"/>
-                <a:cs typeface="Noto Sans SC"/>
-                <a:sym typeface="Noto Sans SC"/>
-              </a:rPr>
-              <a:t>基础环境构建</a:t>
-            </a:r>
-            <a:endParaRPr lang="en-US" sz="1400"/>
-          </a:p>
-        </p:txBody>
-      </p:sp>
-      <p:sp>
-        <p:nvSpPr>
-          <p:cNvPr id="14" name="AutoShape 8">
-            <a:extLst>
-              <a:ext uri="{FF2B5EF4-FFF2-40B4-BE49-F238E27FC236}">
-                <a16:creationId xmlns:a16="http://schemas.microsoft.com/office/drawing/2014/main" id="{6C731A9F-6561-4980-8727-F55F62BB3412}"/>
-              </a:ext>
-            </a:extLst>
-          </p:cNvPr>
-          <p:cNvSpPr/>
-          <p:nvPr/>
-        </p:nvSpPr>
-        <p:spPr>
-          <a:xfrm>
-            <a:off x="889000" y="1891676"/>
-            <a:ext cx="3302000" cy="1524000"/>
-          </a:xfrm>
-          <a:prstGeom prst="rect">
-            <a:avLst/>
-          </a:prstGeom>
-          <a:noFill/>
-          <a:ln w="12700" cap="flat" cmpd="sng">
-            <a:noFill/>
-            <a:prstDash val="solid"/>
-            <a:round/>
-          </a:ln>
-        </p:spPr>
-        <p:txBody>
-          <a:bodyPr vert="horz" wrap="square" lIns="0" tIns="0" rIns="0" bIns="0" rtlCol="0" anchor="ctr" anchorCtr="0"/>
-          <a:lstStyle/>
-          <a:p>
-            <a:pPr marL="0" indent="0" algn="l">
-              <a:lnSpc>
-                <a:spcPct val="116666"/>
-              </a:lnSpc>
-              <a:defRPr/>
-            </a:pPr>
-            <a:r>
-              <a:rPr lang="en-US" sz="1600" b="1" i="0" u="none" strike="noStrike">
-                <a:solidFill>
-                  <a:srgbClr val="374151"/>
-                </a:solidFill>
-                <a:latin typeface="Noto Sans SC"/>
-                <a:ea typeface="Noto Sans SC"/>
-                <a:cs typeface="Noto Sans SC"/>
-                <a:sym typeface="Noto Sans SC"/>
-              </a:rPr>
-              <a:t>Nginx 核心配置：</a:t>
-            </a:r>
-            <a:r>
-              <a:rPr lang="en-US" sz="1600" b="0" i="0" u="none" strike="noStrike">
-                <a:solidFill>
-                  <a:srgbClr val="4B5563"/>
-                </a:solidFill>
-                <a:latin typeface="Noto Sans SC"/>
-                <a:ea typeface="Noto Sans SC"/>
-                <a:cs typeface="Noto Sans SC"/>
-                <a:sym typeface="Noto Sans SC"/>
-              </a:rPr>
-              <a:t>完成反向代理与负载均衡配置，解决前后端服务的路由分发与跨域基础问题。</a:t>
-            </a:r>
-            <a:endParaRPr lang="en-US" sz="1400"/>
-          </a:p>
-          <a:p>
-            <a:pPr marL="0" indent="0" algn="l">
-              <a:lnSpc>
-                <a:spcPct val="116666"/>
-              </a:lnSpc>
-            </a:pPr>
-            <a:r>
-              <a:rPr lang="en-US" sz="1600" b="1" i="0" u="none" strike="noStrike">
-                <a:solidFill>
-                  <a:srgbClr val="374151"/>
-                </a:solidFill>
-                <a:latin typeface="Noto Sans SC"/>
-                <a:ea typeface="Noto Sans SC"/>
-                <a:cs typeface="Noto Sans SC"/>
-                <a:sym typeface="Noto Sans SC"/>
-              </a:rPr>
-              <a:t>服务进程守护：</a:t>
-            </a:r>
-            <a:r>
-              <a:rPr lang="en-US" sz="1600" b="0" i="0" u="none" strike="noStrike">
-                <a:solidFill>
-                  <a:srgbClr val="4B5563"/>
-                </a:solidFill>
-                <a:latin typeface="Noto Sans SC"/>
-                <a:ea typeface="Noto Sans SC"/>
-                <a:cs typeface="Noto Sans SC"/>
-                <a:sym typeface="Noto Sans SC"/>
-              </a:rPr>
-              <a:t>引入 PM2 管理 Node.js 进程，实现服务异常自动重启与日志监控，保障后台常驻。</a:t>
-            </a:r>
-          </a:p>
-        </p:txBody>
-      </p:sp>
-      <p:sp>
-        <p:nvSpPr>
-          <p:cNvPr id="15" name="AutoShape 11">
-            <a:extLst>
-              <a:ext uri="{FF2B5EF4-FFF2-40B4-BE49-F238E27FC236}">
-                <a16:creationId xmlns:a16="http://schemas.microsoft.com/office/drawing/2014/main" id="{CCB07F0E-51C6-4334-A280-D7716FFABD71}"/>
-              </a:ext>
-            </a:extLst>
-          </p:cNvPr>
-          <p:cNvSpPr/>
-          <p:nvPr/>
-        </p:nvSpPr>
-        <p:spPr>
-          <a:xfrm>
-            <a:off x="940931" y="3828527"/>
-            <a:ext cx="3302000" cy="304800"/>
-          </a:xfrm>
-          <a:prstGeom prst="rect">
-            <a:avLst/>
-          </a:prstGeom>
-          <a:noFill/>
-          <a:ln w="12700" cap="flat" cmpd="sng">
-            <a:noFill/>
-            <a:prstDash val="solid"/>
-            <a:round/>
-          </a:ln>
-        </p:spPr>
-        <p:txBody>
-          <a:bodyPr vert="horz" wrap="square" lIns="0" tIns="0" rIns="0" bIns="0" rtlCol="0" anchor="ctr" anchorCtr="0"/>
-          <a:lstStyle/>
-          <a:p>
-            <a:pPr marL="0" indent="0" algn="l">
-              <a:lnSpc>
-                <a:spcPct val="125000"/>
-              </a:lnSpc>
-              <a:defRPr/>
-            </a:pPr>
-            <a:r>
-              <a:rPr lang="en-US" sz="2000" b="1" i="0" u="none" strike="noStrike">
-                <a:solidFill>
-                  <a:srgbClr val="1F2937"/>
-                </a:solidFill>
-                <a:latin typeface="Noto Sans SC"/>
-                <a:ea typeface="Noto Sans SC"/>
-                <a:cs typeface="Noto Sans SC"/>
-                <a:sym typeface="Noto Sans SC"/>
-              </a:rPr>
-              <a:t>数据与安全策略</a:t>
-            </a:r>
-            <a:endParaRPr lang="en-US" sz="1400"/>
-          </a:p>
-        </p:txBody>
-      </p:sp>
-      <p:sp>
-        <p:nvSpPr>
-          <p:cNvPr id="16" name="AutoShape 12">
-            <a:extLst>
-              <a:ext uri="{FF2B5EF4-FFF2-40B4-BE49-F238E27FC236}">
-                <a16:creationId xmlns:a16="http://schemas.microsoft.com/office/drawing/2014/main" id="{D075D1C7-BCB2-47BB-9B4C-FB3B7D579ABE}"/>
-              </a:ext>
-            </a:extLst>
-          </p:cNvPr>
-          <p:cNvSpPr/>
-          <p:nvPr/>
-        </p:nvSpPr>
-        <p:spPr>
-          <a:xfrm>
-            <a:off x="940931" y="4429461"/>
-            <a:ext cx="3302000" cy="1524000"/>
-          </a:xfrm>
-          <a:prstGeom prst="rect">
-            <a:avLst/>
-          </a:prstGeom>
-          <a:noFill/>
-          <a:ln w="12700" cap="flat" cmpd="sng">
-            <a:noFill/>
-            <a:prstDash val="solid"/>
-            <a:round/>
-          </a:ln>
-        </p:spPr>
-        <p:txBody>
-          <a:bodyPr vert="horz" wrap="square" lIns="0" tIns="0" rIns="0" bIns="0" rtlCol="0" anchor="ctr" anchorCtr="0"/>
-          <a:lstStyle/>
-          <a:p>
-            <a:pPr marL="0" indent="0" algn="l">
-              <a:lnSpc>
-                <a:spcPct val="116666"/>
-              </a:lnSpc>
-              <a:defRPr/>
-            </a:pPr>
-            <a:r>
-              <a:rPr lang="en-US" sz="1600" b="1" i="0" u="none" strike="noStrike">
-                <a:solidFill>
-                  <a:srgbClr val="374151"/>
-                </a:solidFill>
-                <a:latin typeface="Noto Sans SC"/>
-                <a:ea typeface="Noto Sans SC"/>
-                <a:cs typeface="Noto Sans SC"/>
-                <a:sym typeface="Noto Sans SC"/>
-              </a:rPr>
-              <a:t>数据库体系化：</a:t>
-            </a:r>
-            <a:r>
-              <a:rPr lang="en-US" sz="1600" b="0" i="0" u="none" strike="noStrike">
-                <a:solidFill>
-                  <a:srgbClr val="4B5563"/>
-                </a:solidFill>
-                <a:latin typeface="Noto Sans SC"/>
-                <a:ea typeface="Noto Sans SC"/>
-                <a:cs typeface="Noto Sans SC"/>
-                <a:sym typeface="Noto Sans SC"/>
-              </a:rPr>
-              <a:t>完成用户权限分级、Schema 设计优化，并制定定期自动备份脚本，防范数据丢失风险。</a:t>
-            </a:r>
-            <a:endParaRPr lang="en-US" sz="1400"/>
-          </a:p>
-          <a:p>
-            <a:pPr marL="0" indent="0" algn="l">
-              <a:lnSpc>
-                <a:spcPct val="116666"/>
-              </a:lnSpc>
-            </a:pPr>
-            <a:r>
-              <a:rPr lang="en-US" sz="1600" b="1" i="0" u="none" strike="noStrike">
-                <a:solidFill>
-                  <a:srgbClr val="374151"/>
-                </a:solidFill>
-                <a:latin typeface="Noto Sans SC"/>
-                <a:ea typeface="Noto Sans SC"/>
-                <a:cs typeface="Noto Sans SC"/>
-                <a:sym typeface="Noto Sans SC"/>
-              </a:rPr>
-              <a:t>静态资源管理：</a:t>
-            </a:r>
-            <a:r>
-              <a:rPr lang="en-US" sz="1600" b="0" i="0" u="none" strike="noStrike">
-                <a:solidFill>
-                  <a:srgbClr val="4B5563"/>
-                </a:solidFill>
-                <a:latin typeface="Noto Sans SC"/>
-                <a:ea typeface="Noto Sans SC"/>
-                <a:cs typeface="Noto Sans SC"/>
-                <a:sym typeface="Noto Sans SC"/>
-              </a:rPr>
-              <a:t>调整项目构建路径，配合 Nginx 配置，彻底解决 Vue 项目打包后静态资源加载失败问题。</a:t>
-            </a:r>
-          </a:p>
-        </p:txBody>
-      </p:sp>
-      <p:pic>
-        <p:nvPicPr>
-          <p:cNvPr id="6" name="图片 5">
-            <a:extLst>
-              <a:ext uri="{FF2B5EF4-FFF2-40B4-BE49-F238E27FC236}">
-                <a16:creationId xmlns:a16="http://schemas.microsoft.com/office/drawing/2014/main" id="{879229A4-5A92-427E-9038-0AA6D8FDDD17}"/>
-              </a:ext>
-            </a:extLst>
-          </p:cNvPr>
-          <p:cNvPicPr>
-            <a:picLocks noChangeAspect="1"/>
-          </p:cNvPicPr>
-          <p:nvPr/>
-        </p:nvPicPr>
-        <p:blipFill>
-          <a:blip r:embed="rId4"/>
-          <a:stretch>
-            <a:fillRect/>
-          </a:stretch>
-        </p:blipFill>
-        <p:spPr>
-          <a:xfrm>
-            <a:off x="4672315" y="2619672"/>
-            <a:ext cx="6873836" cy="1920406"/>
-          </a:xfrm>
-          <a:prstGeom prst="rect">
-            <a:avLst/>
-          </a:prstGeom>
-        </p:spPr>
-      </p:pic>
-    </p:spTree>
-  </p:cSld>
-  <p:clrMapOvr>
-    <a:masterClrMapping/>
-  </p:clrMapOvr>
-  <p:transition>
-    <p:fade/>
-  </p:transition>
-</p:sld>
-</file>
-
-<file path=ppt/slides/slide4.xml><?xml version="1.0" encoding="utf-8"?>
-<p:sld xmlns:a="http://schemas.openxmlformats.org/drawingml/2006/main" xmlns:r="http://schemas.openxmlformats.org/officeDocument/2006/relationships" xmlns:p="http://schemas.openxmlformats.org/presentationml/2006/main">
-  <p:cSld>
-    <p:spTree>
-      <p:nvGrpSpPr>
-        <p:cNvPr id="1" name=""/>
-        <p:cNvGrpSpPr/>
-        <p:nvPr/>
-      </p:nvGrpSpPr>
-      <p:grpSpPr>
-        <a:xfrm>
-          <a:off x="0" y="0"/>
-          <a:ext cx="0" cy="0"/>
-          <a:chOff x="0" y="0"/>
-          <a:chExt cx="0" cy="0"/>
-        </a:xfrm>
-      </p:grpSpPr>
-      <p:sp>
-        <p:nvSpPr>
-          <p:cNvPr id="4" name="powerpoint template design by DAJU_PPT正版来源小红书大橘PPT微信DAJU_PPT请勿抄袭搬运！盗版必究！"/>
-          <p:cNvSpPr>
-            <a:spLocks noGrp="1"/>
-          </p:cNvSpPr>
-          <p:nvPr>
-            <p:ph type="title"/>
-          </p:nvPr>
-        </p:nvSpPr>
-        <p:spPr>
-          <a:prstGeom prst="rect">
-            <a:avLst/>
-          </a:prstGeom>
-        </p:spPr>
-        <p:txBody>
-          <a:bodyPr wrap="square" lIns="72000" tIns="36000" rIns="72000" bIns="36000" anchor="ctr" anchorCtr="0">
-            <a:noAutofit/>
-          </a:bodyPr>
-          <a:lstStyle/>
-          <a:p>
-            <a:r>
-              <a:rPr lang="zh-CN" altLang="en-US" sz="2800">
-                <a:solidFill>
-                  <a:schemeClr val="bg1"/>
-                </a:solidFill>
-                <a:effectLst>
-                  <a:outerShdw blurRad="38100" dist="38100" dir="2700000" algn="tl">
-                    <a:srgbClr val="000000">
-                      <a:alpha val="43137"/>
-                    </a:srgbClr>
-                  </a:outerShdw>
-                </a:effectLst>
-                <a:latin typeface="+mn-lt"/>
-                <a:ea typeface="+mn-ea"/>
-                <a:cs typeface="+mn-ea"/>
-                <a:sym typeface="+mn-lt"/>
-              </a:rPr>
-              <a:t>查琪乐</a:t>
-            </a:r>
-            <a:r>
-              <a:rPr lang="en-US" altLang="zh-CN">
-                <a:sym typeface="+mn-lt"/>
-              </a:rPr>
-              <a:t>-</a:t>
-            </a:r>
             <a:r>
               <a:rPr lang="zh-CN" altLang="en-US">
                 <a:sym typeface="Noto Sans SC"/>
@@ -5258,6 +5053,448 @@
 </p:sld>
 </file>
 
+<file path=ppt/slides/slide4.xml><?xml version="1.0" encoding="utf-8"?>
+<p:sld xmlns:a="http://schemas.openxmlformats.org/drawingml/2006/main" xmlns:r="http://schemas.openxmlformats.org/officeDocument/2006/relationships" xmlns:p="http://schemas.openxmlformats.org/presentationml/2006/main">
+  <p:cSld>
+    <p:spTree>
+      <p:nvGrpSpPr>
+        <p:cNvPr id="1" name=""/>
+        <p:cNvGrpSpPr/>
+        <p:nvPr/>
+      </p:nvGrpSpPr>
+      <p:grpSpPr>
+        <a:xfrm>
+          <a:off x="0" y="0"/>
+          <a:ext cx="0" cy="0"/>
+          <a:chOff x="0" y="0"/>
+          <a:chExt cx="0" cy="0"/>
+        </a:xfrm>
+      </p:grpSpPr>
+      <p:sp>
+        <p:nvSpPr>
+          <p:cNvPr id="4" name="powerpoint template design by DAJU_PPT正版来源小红书大橘PPT微信DAJU_PPT请勿抄袭搬运！盗版必究！"/>
+          <p:cNvSpPr>
+            <a:spLocks noGrp="1"/>
+          </p:cNvSpPr>
+          <p:nvPr>
+            <p:ph type="title"/>
+          </p:nvPr>
+        </p:nvSpPr>
+        <p:spPr>
+          <a:prstGeom prst="rect">
+            <a:avLst/>
+          </a:prstGeom>
+        </p:spPr>
+        <p:txBody>
+          <a:bodyPr wrap="square" lIns="72000" tIns="36000" rIns="72000" bIns="36000" anchor="ctr" anchorCtr="0">
+            <a:noAutofit/>
+          </a:bodyPr>
+          <a:lstStyle/>
+          <a:p>
+            <a:r>
+              <a:rPr lang="en-US" altLang="zh-CN">
+                <a:sym typeface="Noto Sans SC"/>
+              </a:rPr>
+              <a:t>部署与运维能力</a:t>
+            </a:r>
+            <a:endParaRPr lang="zh-CN" altLang="en-US">
+              <a:sym typeface="+mn-lt"/>
+            </a:endParaRPr>
+          </a:p>
+        </p:txBody>
+      </p:sp>
+      <p:sp>
+        <p:nvSpPr>
+          <p:cNvPr id="2" name="powerpoint template design by DAJU_PPT正版来源小红书大橘PPT微信DAJU_PPT请勿抄袭搬运！盗版必究！"/>
+          <p:cNvSpPr>
+            <a:spLocks noGrp="1"/>
+          </p:cNvSpPr>
+          <p:nvPr>
+            <p:ph type="sldNum" sz="quarter" idx="4"/>
+          </p:nvPr>
+        </p:nvSpPr>
+        <p:spPr/>
+        <p:txBody>
+          <a:bodyPr/>
+          <a:lstStyle/>
+          <a:p>
+            <a:fld id="{41DDFDCD-830D-4E78-9097-B6B92A67D61F}" type="slidenum">
+              <a:rPr lang="zh-CN" altLang="en-US" smtClean="0"/>
+              <a:t>4</a:t>
+            </a:fld>
+            <a:endParaRPr lang="zh-CN" altLang="en-US"/>
+          </a:p>
+        </p:txBody>
+      </p:sp>
+      <p:pic>
+        <p:nvPicPr>
+          <p:cNvPr id="5" name="图片 4"/>
+          <p:cNvPicPr>
+            <a:picLocks noChangeAspect="1"/>
+          </p:cNvPicPr>
+          <p:nvPr/>
+        </p:nvPicPr>
+        <p:blipFill>
+          <a:blip r:embed="rId3">
+            <a:extLst>
+              <a:ext uri="{28A0092B-C50C-407E-A947-70E740481C1C}">
+                <a14:useLocalDpi xmlns:a14="http://schemas.microsoft.com/office/drawing/2010/main" val="0"/>
+              </a:ext>
+            </a:extLst>
+          </a:blip>
+          <a:stretch>
+            <a:fillRect/>
+          </a:stretch>
+        </p:blipFill>
+        <p:spPr>
+          <a:xfrm>
+            <a:off x="8282580" y="88496"/>
+            <a:ext cx="4459272" cy="676502"/>
+          </a:xfrm>
+          <a:prstGeom prst="rect">
+            <a:avLst/>
+          </a:prstGeom>
+        </p:spPr>
+      </p:pic>
+      <p:sp>
+        <p:nvSpPr>
+          <p:cNvPr id="13" name="AutoShape 7">
+            <a:extLst>
+              <a:ext uri="{FF2B5EF4-FFF2-40B4-BE49-F238E27FC236}">
+                <a16:creationId xmlns:a16="http://schemas.microsoft.com/office/drawing/2014/main" id="{46438921-8176-4787-B94F-BA83D99C8F14}"/>
+              </a:ext>
+            </a:extLst>
+          </p:cNvPr>
+          <p:cNvSpPr/>
+          <p:nvPr/>
+        </p:nvSpPr>
+        <p:spPr>
+          <a:xfrm>
+            <a:off x="889000" y="1257572"/>
+            <a:ext cx="3302000" cy="304800"/>
+          </a:xfrm>
+          <a:prstGeom prst="rect">
+            <a:avLst/>
+          </a:prstGeom>
+          <a:noFill/>
+          <a:ln w="12700" cap="flat" cmpd="sng">
+            <a:noFill/>
+            <a:prstDash val="solid"/>
+            <a:round/>
+          </a:ln>
+        </p:spPr>
+        <p:txBody>
+          <a:bodyPr vert="horz" wrap="square" lIns="0" tIns="0" rIns="0" bIns="0" rtlCol="0" anchor="ctr" anchorCtr="0"/>
+          <a:lstStyle/>
+          <a:p>
+            <a:pPr marL="0" indent="0" algn="l">
+              <a:lnSpc>
+                <a:spcPct val="125000"/>
+              </a:lnSpc>
+              <a:defRPr/>
+            </a:pPr>
+            <a:r>
+              <a:rPr lang="en-US" sz="2000" b="1" i="0" u="none" strike="noStrike">
+                <a:solidFill>
+                  <a:srgbClr val="1F2937"/>
+                </a:solidFill>
+                <a:latin typeface="Noto Sans SC"/>
+                <a:ea typeface="Noto Sans SC"/>
+                <a:cs typeface="Noto Sans SC"/>
+                <a:sym typeface="Noto Sans SC"/>
+              </a:rPr>
+              <a:t>基础环境构建</a:t>
+            </a:r>
+            <a:endParaRPr lang="en-US" sz="1400"/>
+          </a:p>
+        </p:txBody>
+      </p:sp>
+      <p:sp>
+        <p:nvSpPr>
+          <p:cNvPr id="14" name="AutoShape 8">
+            <a:extLst>
+              <a:ext uri="{FF2B5EF4-FFF2-40B4-BE49-F238E27FC236}">
+                <a16:creationId xmlns:a16="http://schemas.microsoft.com/office/drawing/2014/main" id="{6C731A9F-6561-4980-8727-F55F62BB3412}"/>
+              </a:ext>
+            </a:extLst>
+          </p:cNvPr>
+          <p:cNvSpPr/>
+          <p:nvPr/>
+        </p:nvSpPr>
+        <p:spPr>
+          <a:xfrm>
+            <a:off x="889000" y="1891676"/>
+            <a:ext cx="3302000" cy="1524000"/>
+          </a:xfrm>
+          <a:prstGeom prst="rect">
+            <a:avLst/>
+          </a:prstGeom>
+          <a:noFill/>
+          <a:ln w="12700" cap="flat" cmpd="sng">
+            <a:noFill/>
+            <a:prstDash val="solid"/>
+            <a:round/>
+          </a:ln>
+        </p:spPr>
+        <p:txBody>
+          <a:bodyPr vert="horz" wrap="square" lIns="0" tIns="0" rIns="0" bIns="0" rtlCol="0" anchor="ctr" anchorCtr="0"/>
+          <a:lstStyle/>
+          <a:p>
+            <a:pPr marL="0" indent="0" algn="l">
+              <a:lnSpc>
+                <a:spcPct val="116666"/>
+              </a:lnSpc>
+              <a:defRPr/>
+            </a:pPr>
+            <a:r>
+              <a:rPr lang="en-US" sz="1600" b="1" i="0" u="none" strike="noStrike">
+                <a:solidFill>
+                  <a:srgbClr val="374151"/>
+                </a:solidFill>
+                <a:latin typeface="Noto Sans SC"/>
+                <a:ea typeface="Noto Sans SC"/>
+                <a:cs typeface="Noto Sans SC"/>
+                <a:sym typeface="Noto Sans SC"/>
+              </a:rPr>
+              <a:t>Nginx 核心配置：</a:t>
+            </a:r>
+            <a:r>
+              <a:rPr lang="en-US" sz="1600" b="0" i="0" u="none" strike="noStrike">
+                <a:solidFill>
+                  <a:srgbClr val="4B5563"/>
+                </a:solidFill>
+                <a:latin typeface="Noto Sans SC"/>
+                <a:ea typeface="Noto Sans SC"/>
+                <a:cs typeface="Noto Sans SC"/>
+                <a:sym typeface="Noto Sans SC"/>
+              </a:rPr>
+              <a:t>完成反向代理与负载均衡配置，解决前后端服务的路由分发与跨域基础问题。</a:t>
+            </a:r>
+            <a:endParaRPr lang="en-US" sz="1400"/>
+          </a:p>
+          <a:p>
+            <a:pPr marL="0" indent="0" algn="l">
+              <a:lnSpc>
+                <a:spcPct val="116666"/>
+              </a:lnSpc>
+            </a:pPr>
+            <a:r>
+              <a:rPr lang="en-US" sz="1600" b="1" i="0" u="none" strike="noStrike">
+                <a:solidFill>
+                  <a:srgbClr val="374151"/>
+                </a:solidFill>
+                <a:latin typeface="Noto Sans SC"/>
+                <a:ea typeface="Noto Sans SC"/>
+                <a:cs typeface="Noto Sans SC"/>
+                <a:sym typeface="Noto Sans SC"/>
+              </a:rPr>
+              <a:t>服务进程守护：</a:t>
+            </a:r>
+            <a:r>
+              <a:rPr lang="en-US" sz="1600" b="0" i="0" u="none" strike="noStrike">
+                <a:solidFill>
+                  <a:srgbClr val="4B5563"/>
+                </a:solidFill>
+                <a:latin typeface="Noto Sans SC"/>
+                <a:ea typeface="Noto Sans SC"/>
+                <a:cs typeface="Noto Sans SC"/>
+                <a:sym typeface="Noto Sans SC"/>
+              </a:rPr>
+              <a:t>引入 PM2 管理 Node.js 进程，实现服务异常自动重启与日志监控，保障后台常驻。</a:t>
+            </a:r>
+          </a:p>
+        </p:txBody>
+      </p:sp>
+      <p:sp>
+        <p:nvSpPr>
+          <p:cNvPr id="15" name="AutoShape 11">
+            <a:extLst>
+              <a:ext uri="{FF2B5EF4-FFF2-40B4-BE49-F238E27FC236}">
+                <a16:creationId xmlns:a16="http://schemas.microsoft.com/office/drawing/2014/main" id="{CCB07F0E-51C6-4334-A280-D7716FFABD71}"/>
+              </a:ext>
+            </a:extLst>
+          </p:cNvPr>
+          <p:cNvSpPr/>
+          <p:nvPr/>
+        </p:nvSpPr>
+        <p:spPr>
+          <a:xfrm>
+            <a:off x="940931" y="3828527"/>
+            <a:ext cx="3302000" cy="304800"/>
+          </a:xfrm>
+          <a:prstGeom prst="rect">
+            <a:avLst/>
+          </a:prstGeom>
+          <a:noFill/>
+          <a:ln w="12700" cap="flat" cmpd="sng">
+            <a:noFill/>
+            <a:prstDash val="solid"/>
+            <a:round/>
+          </a:ln>
+        </p:spPr>
+        <p:txBody>
+          <a:bodyPr vert="horz" wrap="square" lIns="0" tIns="0" rIns="0" bIns="0" rtlCol="0" anchor="ctr" anchorCtr="0"/>
+          <a:lstStyle/>
+          <a:p>
+            <a:pPr marL="0" indent="0" algn="l">
+              <a:lnSpc>
+                <a:spcPct val="125000"/>
+              </a:lnSpc>
+              <a:defRPr/>
+            </a:pPr>
+            <a:r>
+              <a:rPr lang="en-US" sz="2000" b="1" i="0" u="none" strike="noStrike">
+                <a:solidFill>
+                  <a:srgbClr val="1F2937"/>
+                </a:solidFill>
+                <a:latin typeface="Noto Sans SC"/>
+                <a:ea typeface="Noto Sans SC"/>
+                <a:cs typeface="Noto Sans SC"/>
+                <a:sym typeface="Noto Sans SC"/>
+              </a:rPr>
+              <a:t>数据与安全策略</a:t>
+            </a:r>
+            <a:endParaRPr lang="en-US" sz="1400"/>
+          </a:p>
+        </p:txBody>
+      </p:sp>
+      <p:sp>
+        <p:nvSpPr>
+          <p:cNvPr id="16" name="AutoShape 12">
+            <a:extLst>
+              <a:ext uri="{FF2B5EF4-FFF2-40B4-BE49-F238E27FC236}">
+                <a16:creationId xmlns:a16="http://schemas.microsoft.com/office/drawing/2014/main" id="{D075D1C7-BCB2-47BB-9B4C-FB3B7D579ABE}"/>
+              </a:ext>
+            </a:extLst>
+          </p:cNvPr>
+          <p:cNvSpPr/>
+          <p:nvPr/>
+        </p:nvSpPr>
+        <p:spPr>
+          <a:xfrm>
+            <a:off x="940931" y="4429461"/>
+            <a:ext cx="3302000" cy="1524000"/>
+          </a:xfrm>
+          <a:prstGeom prst="rect">
+            <a:avLst/>
+          </a:prstGeom>
+          <a:noFill/>
+          <a:ln w="12700" cap="flat" cmpd="sng">
+            <a:noFill/>
+            <a:prstDash val="solid"/>
+            <a:round/>
+          </a:ln>
+        </p:spPr>
+        <p:txBody>
+          <a:bodyPr vert="horz" wrap="square" lIns="0" tIns="0" rIns="0" bIns="0" rtlCol="0" anchor="ctr" anchorCtr="0"/>
+          <a:lstStyle/>
+          <a:p>
+            <a:pPr marL="0" indent="0" algn="l">
+              <a:lnSpc>
+                <a:spcPct val="116666"/>
+              </a:lnSpc>
+              <a:defRPr/>
+            </a:pPr>
+            <a:r>
+              <a:rPr lang="en-US" sz="1600" b="1" i="0" u="none" strike="noStrike">
+                <a:solidFill>
+                  <a:srgbClr val="374151"/>
+                </a:solidFill>
+                <a:latin typeface="Noto Sans SC"/>
+                <a:ea typeface="Noto Sans SC"/>
+                <a:cs typeface="Noto Sans SC"/>
+                <a:sym typeface="Noto Sans SC"/>
+              </a:rPr>
+              <a:t>数据库体系化：</a:t>
+            </a:r>
+            <a:r>
+              <a:rPr lang="en-US" sz="1600" b="0" i="0" u="none" strike="noStrike">
+                <a:solidFill>
+                  <a:srgbClr val="4B5563"/>
+                </a:solidFill>
+                <a:latin typeface="Noto Sans SC"/>
+                <a:ea typeface="Noto Sans SC"/>
+                <a:cs typeface="Noto Sans SC"/>
+                <a:sym typeface="Noto Sans SC"/>
+              </a:rPr>
+              <a:t>完成用户权限分级、Schema 设计优化，并制定定期自动备份脚本，防范数据丢失风险。</a:t>
+            </a:r>
+            <a:endParaRPr lang="en-US" sz="1400"/>
+          </a:p>
+          <a:p>
+            <a:pPr marL="0" indent="0" algn="l">
+              <a:lnSpc>
+                <a:spcPct val="116666"/>
+              </a:lnSpc>
+            </a:pPr>
+            <a:r>
+              <a:rPr lang="en-US" sz="1600" b="1" i="0" u="none" strike="noStrike">
+                <a:solidFill>
+                  <a:srgbClr val="374151"/>
+                </a:solidFill>
+                <a:latin typeface="Noto Sans SC"/>
+                <a:ea typeface="Noto Sans SC"/>
+                <a:cs typeface="Noto Sans SC"/>
+                <a:sym typeface="Noto Sans SC"/>
+              </a:rPr>
+              <a:t>静态资源管理：</a:t>
+            </a:r>
+            <a:r>
+              <a:rPr lang="en-US" sz="1600" b="0" i="0" u="none" strike="noStrike">
+                <a:solidFill>
+                  <a:srgbClr val="4B5563"/>
+                </a:solidFill>
+                <a:latin typeface="Noto Sans SC"/>
+                <a:ea typeface="Noto Sans SC"/>
+                <a:cs typeface="Noto Sans SC"/>
+                <a:sym typeface="Noto Sans SC"/>
+              </a:rPr>
+              <a:t>调整项目构建路径，配合 Nginx 配置，彻底解决 Vue 项目打包后静态资源加载失败问题。</a:t>
+            </a:r>
+          </a:p>
+        </p:txBody>
+      </p:sp>
+      <p:pic>
+        <p:nvPicPr>
+          <p:cNvPr id="6" name="图片 5">
+            <a:extLst>
+              <a:ext uri="{FF2B5EF4-FFF2-40B4-BE49-F238E27FC236}">
+                <a16:creationId xmlns:a16="http://schemas.microsoft.com/office/drawing/2014/main" id="{879229A4-5A92-427E-9038-0AA6D8FDDD17}"/>
+              </a:ext>
+            </a:extLst>
+          </p:cNvPr>
+          <p:cNvPicPr>
+            <a:picLocks noChangeAspect="1"/>
+          </p:cNvPicPr>
+          <p:nvPr/>
+        </p:nvPicPr>
+        <p:blipFill>
+          <a:blip r:embed="rId4"/>
+          <a:stretch>
+            <a:fillRect/>
+          </a:stretch>
+        </p:blipFill>
+        <p:spPr>
+          <a:xfrm>
+            <a:off x="4672315" y="2619672"/>
+            <a:ext cx="6873836" cy="1920406"/>
+          </a:xfrm>
+          <a:prstGeom prst="rect">
+            <a:avLst/>
+          </a:prstGeom>
+        </p:spPr>
+      </p:pic>
+    </p:spTree>
+  </p:cSld>
+  <p:clrMapOvr>
+    <a:masterClrMapping/>
+  </p:clrMapOvr>
+  <p:transition>
+    <p:fade/>
+  </p:transition>
+</p:sld>
+</file>
+
 <file path=ppt/slides/slide5.xml><?xml version="1.0" encoding="utf-8"?>
 <p:sld xmlns:a="http://schemas.openxmlformats.org/drawingml/2006/main" xmlns:r="http://schemas.openxmlformats.org/officeDocument/2006/relationships" xmlns:p="http://schemas.openxmlformats.org/presentationml/2006/main">
   <p:cSld>
@@ -5297,43 +5534,6 @@
           <a:lstStyle/>
           <a:p>
             <a:r>
-              <a:rPr lang="zh-CN" altLang="en-US" sz="2800">
-                <a:solidFill>
-                  <a:schemeClr val="bg1"/>
-                </a:solidFill>
-                <a:effectLst>
-                  <a:outerShdw blurRad="38100" dist="38100" dir="2700000" algn="tl">
-                    <a:srgbClr val="000000">
-                      <a:alpha val="43137"/>
-                    </a:srgbClr>
-                  </a:outerShdw>
-                </a:effectLst>
-                <a:latin typeface="+mn-lt"/>
-                <a:ea typeface="+mn-ea"/>
-                <a:cs typeface="+mn-ea"/>
-                <a:sym typeface="+mn-lt"/>
-              </a:rPr>
-              <a:t>查琪乐</a:t>
-            </a:r>
-            <a:r>
-              <a:rPr lang="en-US" altLang="zh-CN">
-                <a:sym typeface="+mn-lt"/>
-              </a:rPr>
-              <a:t>-</a:t>
-            </a:r>
-            <a:r>
-              <a:rPr lang="en-US" altLang="zh-CN" sz="2800" b="1" i="0" u="none" strike="noStrike">
-                <a:solidFill>
-                  <a:srgbClr val="1F2937"/>
-                </a:solidFill>
-                <a:latin typeface="Noto Sans SC"/>
-                <a:ea typeface="Noto Sans SC"/>
-                <a:cs typeface="Noto Sans SC"/>
-                <a:sym typeface="Noto Sans SC"/>
-              </a:rPr>
-              <a:t> </a:t>
-            </a:r>
-            <a:r>
               <a:rPr lang="en-US" altLang="zh-CN">
                 <a:sym typeface="Noto Sans SC"/>
               </a:rPr>
@@ -5377,10 +5577,10 @@
       </p:pic>
       <p:pic>
         <p:nvPicPr>
-          <p:cNvPr id="3" name="图片 2" descr="图形用户界面, 文本, 应用程序, 电子邮件&#10;&#10;AI 生成的内容可能不正确。">
+          <p:cNvPr id="6" name="图片 5" descr="表格&#10;&#10;AI 生成的内容可能不正确。">
             <a:extLst>
               <a:ext uri="{FF2B5EF4-FFF2-40B4-BE49-F238E27FC236}">
-                <a16:creationId xmlns:a16="http://schemas.microsoft.com/office/drawing/2014/main" id="{DB00907A-7F7A-44CD-861C-8FE3F65DDF22}"/>
+                <a16:creationId xmlns:a16="http://schemas.microsoft.com/office/drawing/2014/main" id="{25C16E78-0F21-402D-BE96-6FB4CA5182CB}"/>
               </a:ext>
             </a:extLst>
           </p:cNvPr>
@@ -5403,8 +5603,44 @@
         </p:blipFill>
         <p:spPr>
           <a:xfrm>
-            <a:off x="1809704" y="1666091"/>
-            <a:ext cx="8775764" cy="4304403"/>
+            <a:off x="559444" y="1269497"/>
+            <a:ext cx="5862871" cy="885224"/>
+          </a:xfrm>
+          <a:prstGeom prst="rect">
+            <a:avLst/>
+          </a:prstGeom>
+        </p:spPr>
+      </p:pic>
+      <p:pic>
+        <p:nvPicPr>
+          <p:cNvPr id="8" name="图片 7" descr="图形用户界面, 应用程序&#10;&#10;AI 生成的内容可能不正确。">
+            <a:extLst>
+              <a:ext uri="{FF2B5EF4-FFF2-40B4-BE49-F238E27FC236}">
+                <a16:creationId xmlns:a16="http://schemas.microsoft.com/office/drawing/2014/main" id="{DA3ABF6B-3D14-4AE5-8D02-E051D1B96661}"/>
+              </a:ext>
+            </a:extLst>
+          </p:cNvPr>
+          <p:cNvPicPr>
+            <a:picLocks noChangeAspect="1"/>
+          </p:cNvPicPr>
+          <p:nvPr/>
+        </p:nvPicPr>
+        <p:blipFill>
+          <a:blip r:embed="rId5">
+            <a:extLst>
+              <a:ext uri="{28A0092B-C50C-407E-A947-70E740481C1C}">
+                <a14:useLocalDpi xmlns:a14="http://schemas.microsoft.com/office/drawing/2010/main" val="0"/>
+              </a:ext>
+            </a:extLst>
+          </a:blip>
+          <a:stretch>
+            <a:fillRect/>
+          </a:stretch>
+        </p:blipFill>
+        <p:spPr>
+          <a:xfrm>
+            <a:off x="4260987" y="991332"/>
+            <a:ext cx="7502692" cy="5517044"/>
           </a:xfrm>
           <a:prstGeom prst="rect">
             <a:avLst/>
@@ -5465,43 +5701,6 @@
           </a:bodyPr>
           <a:lstStyle/>
           <a:p>
-            <a:r>
-              <a:rPr lang="zh-CN" altLang="en-US" sz="2800">
-                <a:solidFill>
-                  <a:schemeClr val="bg1"/>
-                </a:solidFill>
-                <a:effectLst>
-                  <a:outerShdw blurRad="38100" dist="38100" dir="2700000" algn="tl">
-                    <a:srgbClr val="000000">
-                      <a:alpha val="43137"/>
-                    </a:srgbClr>
-                  </a:outerShdw>
-                </a:effectLst>
-                <a:latin typeface="+mn-lt"/>
-                <a:ea typeface="+mn-ea"/>
-                <a:cs typeface="+mn-ea"/>
-                <a:sym typeface="+mn-lt"/>
-              </a:rPr>
-              <a:t>查琪乐</a:t>
-            </a:r>
-            <a:r>
-              <a:rPr lang="en-US" altLang="zh-CN">
-                <a:sym typeface="+mn-lt"/>
-              </a:rPr>
-              <a:t>-</a:t>
-            </a:r>
-            <a:r>
-              <a:rPr lang="en-US" altLang="zh-CN" sz="2800" b="1" i="0" u="none" strike="noStrike">
-                <a:solidFill>
-                  <a:srgbClr val="1F2937"/>
-                </a:solidFill>
-                <a:latin typeface="Noto Sans SC"/>
-                <a:ea typeface="Noto Sans SC"/>
-                <a:cs typeface="Noto Sans SC"/>
-                <a:sym typeface="Noto Sans SC"/>
-              </a:rPr>
-              <a:t> </a:t>
-            </a:r>
             <a:r>
               <a:rPr lang="en-US" altLang="zh-CN">
                 <a:sym typeface="Noto Sans SC"/>
@@ -5844,10 +6043,10 @@
       </p:sp>
       <p:pic>
         <p:nvPicPr>
-          <p:cNvPr id="3" name="图片 2">
+          <p:cNvPr id="12" name="图片 11">
             <a:extLst>
               <a:ext uri="{FF2B5EF4-FFF2-40B4-BE49-F238E27FC236}">
-                <a16:creationId xmlns:a16="http://schemas.microsoft.com/office/drawing/2014/main" id="{7B6F9109-976E-492B-8CAB-51A5FD6C9F1E}"/>
+                <a16:creationId xmlns:a16="http://schemas.microsoft.com/office/drawing/2014/main" id="{8F313972-B617-4663-BF46-DB7DEEA49677}"/>
               </a:ext>
             </a:extLst>
           </p:cNvPr>
@@ -5864,8 +6063,8 @@
         </p:blipFill>
         <p:spPr>
           <a:xfrm>
-            <a:off x="7582908" y="1266862"/>
-            <a:ext cx="2130171" cy="5247343"/>
+            <a:off x="7326592" y="1021793"/>
+            <a:ext cx="3657255" cy="5627832"/>
           </a:xfrm>
           <a:prstGeom prst="rect">
             <a:avLst/>
@@ -5889,6 +6088,1150 @@
 </file>
 
 <file path=ppt/slides/slide7.xml><?xml version="1.0" encoding="utf-8"?>
+<p:sld xmlns:a="http://schemas.openxmlformats.org/drawingml/2006/main" xmlns:r="http://schemas.openxmlformats.org/officeDocument/2006/relationships" xmlns:p="http://schemas.openxmlformats.org/presentationml/2006/main">
+  <p:cSld>
+    <p:spTree>
+      <p:nvGrpSpPr>
+        <p:cNvPr id="1" name=""/>
+        <p:cNvGrpSpPr/>
+        <p:nvPr/>
+      </p:nvGrpSpPr>
+      <p:grpSpPr>
+        <a:xfrm>
+          <a:off x="0" y="0"/>
+          <a:ext cx="0" cy="0"/>
+          <a:chOff x="0" y="0"/>
+          <a:chExt cx="0" cy="0"/>
+        </a:xfrm>
+      </p:grpSpPr>
+      <p:sp>
+        <p:nvSpPr>
+          <p:cNvPr id="4" name="powerpoint template design by DAJU_PPT正版来源小红书大橘PPT微信DAJU_PPT请勿抄袭搬运！盗版必究！"/>
+          <p:cNvSpPr>
+            <a:spLocks noGrp="1"/>
+          </p:cNvSpPr>
+          <p:nvPr>
+            <p:ph type="title"/>
+          </p:nvPr>
+        </p:nvSpPr>
+        <p:spPr>
+          <a:prstGeom prst="rect">
+            <a:avLst/>
+          </a:prstGeom>
+        </p:spPr>
+        <p:txBody>
+          <a:bodyPr wrap="square" lIns="72000" tIns="36000" rIns="72000" bIns="36000" anchor="ctr" anchorCtr="0">
+            <a:noAutofit/>
+          </a:bodyPr>
+          <a:lstStyle/>
+          <a:p>
+            <a:r>
+              <a:rPr lang="en-US" altLang="zh-CN">
+                <a:sym typeface="Noto Sans SC"/>
+              </a:rPr>
+              <a:t>Git协作管理</a:t>
+            </a:r>
+            <a:endParaRPr lang="zh-CN" altLang="en-US" dirty="0">
+              <a:sym typeface="+mn-lt"/>
+            </a:endParaRPr>
+          </a:p>
+        </p:txBody>
+      </p:sp>
+      <p:pic>
+        <p:nvPicPr>
+          <p:cNvPr id="5" name="图片 4"/>
+          <p:cNvPicPr>
+            <a:picLocks noChangeAspect="1"/>
+          </p:cNvPicPr>
+          <p:nvPr/>
+        </p:nvPicPr>
+        <p:blipFill>
+          <a:blip r:embed="rId3">
+            <a:extLst>
+              <a:ext uri="{28A0092B-C50C-407E-A947-70E740481C1C}">
+                <a14:useLocalDpi xmlns:a14="http://schemas.microsoft.com/office/drawing/2010/main" val="0"/>
+              </a:ext>
+            </a:extLst>
+          </a:blip>
+          <a:stretch>
+            <a:fillRect/>
+          </a:stretch>
+        </p:blipFill>
+        <p:spPr>
+          <a:xfrm>
+            <a:off x="8282580" y="88496"/>
+            <a:ext cx="4459272" cy="676502"/>
+          </a:xfrm>
+          <a:prstGeom prst="rect">
+            <a:avLst/>
+          </a:prstGeom>
+        </p:spPr>
+      </p:pic>
+      <p:pic>
+        <p:nvPicPr>
+          <p:cNvPr id="11" name="图片 10">
+            <a:extLst>
+              <a:ext uri="{FF2B5EF4-FFF2-40B4-BE49-F238E27FC236}">
+                <a16:creationId xmlns:a16="http://schemas.microsoft.com/office/drawing/2014/main" id="{E3F7AD3A-397F-4F26-935D-7F8D17185FEC}"/>
+              </a:ext>
+            </a:extLst>
+          </p:cNvPr>
+          <p:cNvPicPr>
+            <a:picLocks noChangeAspect="1"/>
+          </p:cNvPicPr>
+          <p:nvPr/>
+        </p:nvPicPr>
+        <p:blipFill>
+          <a:blip r:embed="rId4"/>
+          <a:stretch>
+            <a:fillRect/>
+          </a:stretch>
+        </p:blipFill>
+        <p:spPr>
+          <a:xfrm>
+            <a:off x="7879405" y="905540"/>
+            <a:ext cx="3810706" cy="5863964"/>
+          </a:xfrm>
+          <a:prstGeom prst="rect">
+            <a:avLst/>
+          </a:prstGeom>
+        </p:spPr>
+      </p:pic>
+      <p:sp>
+        <p:nvSpPr>
+          <p:cNvPr id="14" name="文本框 13">
+            <a:extLst>
+              <a:ext uri="{FF2B5EF4-FFF2-40B4-BE49-F238E27FC236}">
+                <a16:creationId xmlns:a16="http://schemas.microsoft.com/office/drawing/2014/main" id="{245AABD3-7F60-477C-9959-DB05C0B48850}"/>
+              </a:ext>
+            </a:extLst>
+          </p:cNvPr>
+          <p:cNvSpPr txBox="1"/>
+          <p:nvPr/>
+        </p:nvSpPr>
+        <p:spPr>
+          <a:xfrm>
+            <a:off x="559444" y="1627645"/>
+            <a:ext cx="5337243" cy="1323439"/>
+          </a:xfrm>
+          <a:prstGeom prst="rect">
+            <a:avLst/>
+          </a:prstGeom>
+          <a:noFill/>
+        </p:spPr>
+        <p:txBody>
+          <a:bodyPr wrap="square" rtlCol="0">
+            <a:spAutoFit/>
+          </a:bodyPr>
+          <a:lstStyle/>
+          <a:p>
+            <a:r>
+              <a:rPr lang="zh-CN" altLang="en-US" sz="2000"/>
+              <a:t>彩色线条 </a:t>
+            </a:r>
+            <a:r>
+              <a:rPr lang="en-US" altLang="zh-CN" sz="2000"/>
+              <a:t>— </a:t>
+            </a:r>
+            <a:r>
+              <a:rPr lang="zh-CN" altLang="en-US" sz="2000"/>
+              <a:t>代表不同的分支线</a:t>
+            </a:r>
+          </a:p>
+          <a:p>
+            <a:r>
+              <a:rPr lang="zh-CN" altLang="en-US" sz="2000"/>
+              <a:t>圆点 </a:t>
+            </a:r>
+            <a:r>
+              <a:rPr lang="en-US" altLang="zh-CN" sz="2000"/>
+              <a:t>— </a:t>
+            </a:r>
+            <a:r>
+              <a:rPr lang="zh-CN" altLang="en-US" sz="2000"/>
+              <a:t>代表具体的提交（</a:t>
+            </a:r>
+            <a:r>
+              <a:rPr lang="en-US" altLang="zh-CN" sz="2000"/>
+              <a:t>commit</a:t>
+            </a:r>
+            <a:r>
+              <a:rPr lang="zh-CN" altLang="en-US" sz="2000"/>
+              <a:t>）</a:t>
+            </a:r>
+          </a:p>
+          <a:p>
+            <a:r>
+              <a:rPr lang="zh-CN" altLang="en-US" sz="2000"/>
+              <a:t>提交信息 </a:t>
+            </a:r>
+            <a:r>
+              <a:rPr lang="en-US" altLang="zh-CN" sz="2000"/>
+              <a:t>— </a:t>
+            </a:r>
+            <a:r>
+              <a:rPr lang="zh-CN" altLang="en-US" sz="2000"/>
+              <a:t>显示 </a:t>
+            </a:r>
+            <a:r>
+              <a:rPr lang="en-US" altLang="zh-CN" sz="2000"/>
+              <a:t>commit message </a:t>
+            </a:r>
+            <a:r>
+              <a:rPr lang="zh-CN" altLang="en-US" sz="2000"/>
+              <a:t>和作者</a:t>
+            </a:r>
+          </a:p>
+          <a:p>
+            <a:r>
+              <a:rPr lang="zh-CN" altLang="en-US" sz="2000"/>
+              <a:t>合并记录 </a:t>
+            </a:r>
+            <a:r>
+              <a:rPr lang="en-US" altLang="zh-CN" sz="2000"/>
+              <a:t>— </a:t>
+            </a:r>
+            <a:r>
+              <a:rPr lang="zh-CN" altLang="en-US" sz="2000"/>
+              <a:t>如 </a:t>
+            </a:r>
+            <a:r>
+              <a:rPr lang="en-US" altLang="zh-CN" sz="2000"/>
+              <a:t>Merge pull request #91 </a:t>
+            </a:r>
+            <a:r>
+              <a:rPr lang="zh-CN" altLang="en-US" sz="2000"/>
+              <a:t>等</a:t>
+            </a:r>
+          </a:p>
+        </p:txBody>
+      </p:sp>
+      <p:pic>
+        <p:nvPicPr>
+          <p:cNvPr id="17" name="图片 16">
+            <a:extLst>
+              <a:ext uri="{FF2B5EF4-FFF2-40B4-BE49-F238E27FC236}">
+                <a16:creationId xmlns:a16="http://schemas.microsoft.com/office/drawing/2014/main" id="{AEAB2089-86FB-4376-B62F-39A04EB01F01}"/>
+              </a:ext>
+            </a:extLst>
+          </p:cNvPr>
+          <p:cNvPicPr>
+            <a:picLocks noChangeAspect="1"/>
+          </p:cNvPicPr>
+          <p:nvPr/>
+        </p:nvPicPr>
+        <p:blipFill>
+          <a:blip r:embed="rId5"/>
+          <a:stretch>
+            <a:fillRect/>
+          </a:stretch>
+        </p:blipFill>
+        <p:spPr>
+          <a:xfrm>
+            <a:off x="251517" y="3199626"/>
+            <a:ext cx="7756925" cy="2752834"/>
+          </a:xfrm>
+          <a:prstGeom prst="rect">
+            <a:avLst/>
+          </a:prstGeom>
+        </p:spPr>
+      </p:pic>
+    </p:spTree>
+    <p:extLst>
+      <p:ext uri="{BB962C8B-B14F-4D97-AF65-F5344CB8AC3E}">
+        <p14:creationId xmlns:p14="http://schemas.microsoft.com/office/powerpoint/2010/main" val="411974450"/>
+      </p:ext>
+    </p:extLst>
+  </p:cSld>
+  <p:clrMapOvr>
+    <a:masterClrMapping/>
+  </p:clrMapOvr>
+  <p:transition>
+    <p:fade/>
+  </p:transition>
+</p:sld>
+</file>
+
+<file path=ppt/slides/slide8.xml><?xml version="1.0" encoding="utf-8"?>
+<p:sld xmlns:a="http://schemas.openxmlformats.org/drawingml/2006/main" xmlns:r="http://schemas.openxmlformats.org/officeDocument/2006/relationships" xmlns:p="http://schemas.openxmlformats.org/presentationml/2006/main">
+  <p:cSld>
+    <p:spTree>
+      <p:nvGrpSpPr>
+        <p:cNvPr id="1" name=""/>
+        <p:cNvGrpSpPr/>
+        <p:nvPr/>
+      </p:nvGrpSpPr>
+      <p:grpSpPr>
+        <a:xfrm>
+          <a:off x="0" y="0"/>
+          <a:ext cx="0" cy="0"/>
+          <a:chOff x="0" y="0"/>
+          <a:chExt cx="0" cy="0"/>
+        </a:xfrm>
+      </p:grpSpPr>
+      <p:sp>
+        <p:nvSpPr>
+          <p:cNvPr id="4" name="powerpoint template design by DAJU_PPT正版来源小红书大橘PPT微信DAJU_PPT请勿抄袭搬运！盗版必究！"/>
+          <p:cNvSpPr>
+            <a:spLocks noGrp="1"/>
+          </p:cNvSpPr>
+          <p:nvPr>
+            <p:ph type="title"/>
+          </p:nvPr>
+        </p:nvSpPr>
+        <p:spPr>
+          <a:prstGeom prst="rect">
+            <a:avLst/>
+          </a:prstGeom>
+        </p:spPr>
+        <p:txBody>
+          <a:bodyPr wrap="square" lIns="72000" tIns="36000" rIns="72000" bIns="36000" anchor="ctr" anchorCtr="0">
+            <a:noAutofit/>
+          </a:bodyPr>
+          <a:lstStyle/>
+          <a:p>
+            <a:r>
+              <a:rPr lang="en-US" altLang="zh-CN">
+                <a:sym typeface="Noto Sans SC"/>
+              </a:rPr>
+              <a:t>Git协作管理</a:t>
+            </a:r>
+            <a:endParaRPr lang="zh-CN" altLang="en-US" dirty="0">
+              <a:sym typeface="+mn-lt"/>
+            </a:endParaRPr>
+          </a:p>
+        </p:txBody>
+      </p:sp>
+      <p:pic>
+        <p:nvPicPr>
+          <p:cNvPr id="5" name="图片 4"/>
+          <p:cNvPicPr>
+            <a:picLocks noChangeAspect="1"/>
+          </p:cNvPicPr>
+          <p:nvPr/>
+        </p:nvPicPr>
+        <p:blipFill>
+          <a:blip r:embed="rId3">
+            <a:extLst>
+              <a:ext uri="{28A0092B-C50C-407E-A947-70E740481C1C}">
+                <a14:useLocalDpi xmlns:a14="http://schemas.microsoft.com/office/drawing/2010/main" val="0"/>
+              </a:ext>
+            </a:extLst>
+          </a:blip>
+          <a:stretch>
+            <a:fillRect/>
+          </a:stretch>
+        </p:blipFill>
+        <p:spPr>
+          <a:xfrm>
+            <a:off x="8282580" y="88496"/>
+            <a:ext cx="4459272" cy="676502"/>
+          </a:xfrm>
+          <a:prstGeom prst="rect">
+            <a:avLst/>
+          </a:prstGeom>
+        </p:spPr>
+      </p:pic>
+      <p:pic>
+        <p:nvPicPr>
+          <p:cNvPr id="11" name="图片 10">
+            <a:extLst>
+              <a:ext uri="{FF2B5EF4-FFF2-40B4-BE49-F238E27FC236}">
+                <a16:creationId xmlns:a16="http://schemas.microsoft.com/office/drawing/2014/main" id="{E3F7AD3A-397F-4F26-935D-7F8D17185FEC}"/>
+              </a:ext>
+            </a:extLst>
+          </p:cNvPr>
+          <p:cNvPicPr>
+            <a:picLocks noChangeAspect="1"/>
+          </p:cNvPicPr>
+          <p:nvPr/>
+        </p:nvPicPr>
+        <p:blipFill>
+          <a:blip r:embed="rId4"/>
+          <a:stretch>
+            <a:fillRect/>
+          </a:stretch>
+        </p:blipFill>
+        <p:spPr>
+          <a:xfrm>
+            <a:off x="8166881" y="872998"/>
+            <a:ext cx="3810706" cy="5863964"/>
+          </a:xfrm>
+          <a:prstGeom prst="rect">
+            <a:avLst/>
+          </a:prstGeom>
+        </p:spPr>
+      </p:pic>
+      <p:graphicFrame>
+        <p:nvGraphicFramePr>
+          <p:cNvPr id="13" name="表格 14">
+            <a:extLst>
+              <a:ext uri="{FF2B5EF4-FFF2-40B4-BE49-F238E27FC236}">
+                <a16:creationId xmlns:a16="http://schemas.microsoft.com/office/drawing/2014/main" id="{D3C9BEB9-80B5-4DFE-A39D-5F9148DA5FAA}"/>
+              </a:ext>
+            </a:extLst>
+          </p:cNvPr>
+          <p:cNvGraphicFramePr>
+            <a:graphicFrameLocks noGrp="1"/>
+          </p:cNvGraphicFramePr>
+          <p:nvPr>
+            <p:extLst>
+              <p:ext uri="{D42A27DB-BD31-4B8C-83A1-F6EECF244321}">
+                <p14:modId xmlns:p14="http://schemas.microsoft.com/office/powerpoint/2010/main" val="3204708574"/>
+              </p:ext>
+            </p:extLst>
+          </p:nvPr>
+        </p:nvGraphicFramePr>
+        <p:xfrm>
+          <a:off x="370115" y="1341064"/>
+          <a:ext cx="7500256" cy="4994423"/>
+        </p:xfrm>
+        <a:graphic>
+          <a:graphicData uri="http://schemas.openxmlformats.org/drawingml/2006/table">
+            <a:tbl>
+              <a:tblPr firstRow="1" bandRow="1">
+                <a:tableStyleId>{5C22544A-7EE6-4342-B048-85BDC9FD1C3A}</a:tableStyleId>
+              </a:tblPr>
+              <a:tblGrid>
+                <a:gridCol w="1195532">
+                  <a:extLst>
+                    <a:ext uri="{9D8B030D-6E8A-4147-A177-3AD203B41FA5}">
+                      <a16:colId xmlns:a16="http://schemas.microsoft.com/office/drawing/2014/main" val="2862844100"/>
+                    </a:ext>
+                  </a:extLst>
+                </a:gridCol>
+                <a:gridCol w="2424490">
+                  <a:extLst>
+                    <a:ext uri="{9D8B030D-6E8A-4147-A177-3AD203B41FA5}">
+                      <a16:colId xmlns:a16="http://schemas.microsoft.com/office/drawing/2014/main" val="2197709662"/>
+                    </a:ext>
+                  </a:extLst>
+                </a:gridCol>
+                <a:gridCol w="3880234">
+                  <a:extLst>
+                    <a:ext uri="{9D8B030D-6E8A-4147-A177-3AD203B41FA5}">
+                      <a16:colId xmlns:a16="http://schemas.microsoft.com/office/drawing/2014/main" val="529830793"/>
+                    </a:ext>
+                  </a:extLst>
+                </a:gridCol>
+              </a:tblGrid>
+              <a:tr h="713489">
+                <a:tc>
+                  <a:txBody>
+                    <a:bodyPr/>
+                    <a:lstStyle/>
+                    <a:p>
+                      <a:pPr algn="l" fontAlgn="t"/>
+                      <a:r>
+                        <a:rPr lang="zh-CN" altLang="en-US" b="1">
+                          <a:effectLst/>
+                          <a:latin typeface="inherit"/>
+                        </a:rPr>
+                        <a:t>图标</a:t>
+                      </a:r>
+                    </a:p>
+                  </a:txBody>
+                  <a:tcPr marL="121920" marR="121920" marT="76200" marB="76200"/>
+                </a:tc>
+                <a:tc>
+                  <a:txBody>
+                    <a:bodyPr/>
+                    <a:lstStyle/>
+                    <a:p>
+                      <a:pPr algn="l" fontAlgn="t"/>
+                      <a:r>
+                        <a:rPr lang="zh-CN" altLang="en-US" b="1">
+                          <a:effectLst/>
+                          <a:latin typeface="inherit"/>
+                        </a:rPr>
+                        <a:t>名称</a:t>
+                      </a:r>
+                    </a:p>
+                  </a:txBody>
+                  <a:tcPr marL="121920" marR="121920" marT="76200" marB="76200"/>
+                </a:tc>
+                <a:tc>
+                  <a:txBody>
+                    <a:bodyPr/>
+                    <a:lstStyle/>
+                    <a:p>
+                      <a:pPr algn="l" fontAlgn="t"/>
+                      <a:r>
+                        <a:rPr lang="zh-CN" altLang="en-US" b="1">
+                          <a:effectLst/>
+                          <a:latin typeface="inherit"/>
+                        </a:rPr>
+                        <a:t>功能说明</a:t>
+                      </a:r>
+                    </a:p>
+                  </a:txBody>
+                  <a:tcPr marL="121920" marR="121920" marT="76200" marB="76200"/>
+                </a:tc>
+                <a:extLst>
+                  <a:ext uri="{0D108BD9-81ED-4DB2-BD59-A6C34878D82A}">
+                    <a16:rowId xmlns:a16="http://schemas.microsoft.com/office/drawing/2014/main" val="3470332098"/>
+                  </a:ext>
+                </a:extLst>
+              </a:tr>
+              <a:tr h="713489">
+                <a:tc>
+                  <a:txBody>
+                    <a:bodyPr/>
+                    <a:lstStyle/>
+                    <a:p>
+                      <a:pPr algn="l" fontAlgn="t"/>
+                      <a:endParaRPr lang="zh-CN" altLang="en-US">
+                        <a:effectLst/>
+                        <a:latin typeface="inherit"/>
+                      </a:endParaRPr>
+                    </a:p>
+                  </a:txBody>
+                  <a:tcPr marL="121920" marR="121920" marT="76200" marB="76200"/>
+                </a:tc>
+                <a:tc>
+                  <a:txBody>
+                    <a:bodyPr/>
+                    <a:lstStyle/>
+                    <a:p>
+                      <a:pPr algn="l" fontAlgn="t"/>
+                      <a:r>
+                        <a:rPr lang="zh-CN" altLang="en-US" b="1">
+                          <a:effectLst/>
+                          <a:latin typeface="inherit"/>
+                        </a:rPr>
+                        <a:t>自动</a:t>
+                      </a:r>
+                      <a:endParaRPr lang="zh-CN" altLang="en-US">
+                        <a:effectLst/>
+                        <a:latin typeface="inherit"/>
+                      </a:endParaRPr>
+                    </a:p>
+                  </a:txBody>
+                  <a:tcPr marL="121920" marR="121920" marT="76200" marB="76200"/>
+                </a:tc>
+                <a:tc>
+                  <a:txBody>
+                    <a:bodyPr/>
+                    <a:lstStyle/>
+                    <a:p>
+                      <a:pPr algn="l" fontAlgn="t"/>
+                      <a:r>
+                        <a:rPr lang="zh-CN" altLang="en-US">
+                          <a:effectLst/>
+                          <a:latin typeface="inherit"/>
+                        </a:rPr>
+                        <a:t>自动暂存并提交所有更改</a:t>
+                      </a:r>
+                    </a:p>
+                  </a:txBody>
+                  <a:tcPr marL="121920" marR="121920" marT="76200" marB="76200"/>
+                </a:tc>
+                <a:extLst>
+                  <a:ext uri="{0D108BD9-81ED-4DB2-BD59-A6C34878D82A}">
+                    <a16:rowId xmlns:a16="http://schemas.microsoft.com/office/drawing/2014/main" val="3298894615"/>
+                  </a:ext>
+                </a:extLst>
+              </a:tr>
+              <a:tr h="713489">
+                <a:tc>
+                  <a:txBody>
+                    <a:bodyPr/>
+                    <a:lstStyle/>
+                    <a:p>
+                      <a:pPr algn="l" fontAlgn="t"/>
+                      <a:endParaRPr lang="en-US">
+                        <a:effectLst/>
+                        <a:latin typeface="inherit"/>
+                      </a:endParaRPr>
+                    </a:p>
+                  </a:txBody>
+                  <a:tcPr marL="121920" marR="121920" marT="76200" marB="76200"/>
+                </a:tc>
+                <a:tc>
+                  <a:txBody>
+                    <a:bodyPr/>
+                    <a:lstStyle/>
+                    <a:p>
+                      <a:pPr algn="l" fontAlgn="t"/>
+                      <a:r>
+                        <a:rPr lang="zh-CN" altLang="en-US" b="1">
+                          <a:effectLst/>
+                          <a:latin typeface="inherit"/>
+                        </a:rPr>
+                        <a:t>提交历史 </a:t>
+                      </a:r>
+                      <a:r>
+                        <a:rPr lang="en-US" altLang="zh-CN" b="1">
+                          <a:effectLst/>
+                          <a:latin typeface="inherit"/>
+                        </a:rPr>
+                        <a:t>/ </a:t>
+                      </a:r>
+                      <a:r>
+                        <a:rPr lang="zh-CN" altLang="en-US" b="1">
+                          <a:effectLst/>
+                          <a:latin typeface="inherit"/>
+                        </a:rPr>
+                        <a:t>时间线</a:t>
+                      </a:r>
+                      <a:endParaRPr lang="zh-CN" altLang="en-US">
+                        <a:effectLst/>
+                        <a:latin typeface="inherit"/>
+                      </a:endParaRPr>
+                    </a:p>
+                  </a:txBody>
+                  <a:tcPr marL="121920" marR="121920" marT="76200" marB="76200"/>
+                </a:tc>
+                <a:tc>
+                  <a:txBody>
+                    <a:bodyPr/>
+                    <a:lstStyle/>
+                    <a:p>
+                      <a:pPr algn="l" fontAlgn="t"/>
+                      <a:r>
+                        <a:rPr lang="zh-CN" altLang="en-US">
+                          <a:effectLst/>
+                          <a:latin typeface="inherit"/>
+                        </a:rPr>
+                        <a:t>查看当前分支的提交历史记录</a:t>
+                      </a:r>
+                    </a:p>
+                  </a:txBody>
+                  <a:tcPr marL="121920" marR="121920" marT="76200" marB="76200"/>
+                </a:tc>
+                <a:extLst>
+                  <a:ext uri="{0D108BD9-81ED-4DB2-BD59-A6C34878D82A}">
+                    <a16:rowId xmlns:a16="http://schemas.microsoft.com/office/drawing/2014/main" val="4189077049"/>
+                  </a:ext>
+                </a:extLst>
+              </a:tr>
+              <a:tr h="713489">
+                <a:tc>
+                  <a:txBody>
+                    <a:bodyPr/>
+                    <a:lstStyle/>
+                    <a:p>
+                      <a:pPr algn="l" fontAlgn="t"/>
+                      <a:endParaRPr lang="zh-CN" altLang="en-US">
+                        <a:effectLst/>
+                        <a:latin typeface="inherit"/>
+                      </a:endParaRPr>
+                    </a:p>
+                  </a:txBody>
+                  <a:tcPr marL="121920" marR="121920" marT="76200" marB="76200"/>
+                </a:tc>
+                <a:tc>
+                  <a:txBody>
+                    <a:bodyPr/>
+                    <a:lstStyle/>
+                    <a:p>
+                      <a:pPr algn="l" fontAlgn="t"/>
+                      <a:r>
+                        <a:rPr lang="zh-CN" altLang="en-US" sz="1800" b="1" i="0" kern="1200">
+                          <a:solidFill>
+                            <a:schemeClr val="dk1"/>
+                          </a:solidFill>
+                          <a:effectLst/>
+                          <a:latin typeface="+mn-lt"/>
+                          <a:ea typeface="+mn-ea"/>
+                          <a:cs typeface="+mn-cs"/>
+                        </a:rPr>
+                        <a:t>抓取（</a:t>
+                      </a:r>
+                      <a:r>
+                        <a:rPr lang="en-US" altLang="zh-CN" sz="1800" b="1" i="0" kern="1200">
+                          <a:solidFill>
+                            <a:schemeClr val="dk1"/>
+                          </a:solidFill>
+                          <a:effectLst/>
+                          <a:latin typeface="+mn-lt"/>
+                          <a:ea typeface="+mn-ea"/>
+                          <a:cs typeface="+mn-cs"/>
+                        </a:rPr>
+                        <a:t>Fetch</a:t>
+                      </a:r>
+                      <a:r>
+                        <a:rPr lang="zh-CN" altLang="en-US" sz="1800" b="1" i="0" kern="1200">
+                          <a:solidFill>
+                            <a:schemeClr val="dk1"/>
+                          </a:solidFill>
+                          <a:effectLst/>
+                          <a:latin typeface="+mn-lt"/>
+                          <a:ea typeface="+mn-ea"/>
+                          <a:cs typeface="+mn-cs"/>
+                        </a:rPr>
+                        <a:t>）</a:t>
+                      </a:r>
+                      <a:endParaRPr lang="en-US">
+                        <a:effectLst/>
+                        <a:latin typeface="inherit"/>
+                      </a:endParaRPr>
+                    </a:p>
+                  </a:txBody>
+                  <a:tcPr marL="121920" marR="121920" marT="76200" marB="76200"/>
+                </a:tc>
+                <a:tc>
+                  <a:txBody>
+                    <a:bodyPr/>
+                    <a:lstStyle/>
+                    <a:p>
+                      <a:pPr algn="l" fontAlgn="t"/>
+                      <a:r>
+                        <a:rPr lang="zh-CN" altLang="en-US" sz="1800" b="0" i="0" kern="1200">
+                          <a:solidFill>
+                            <a:schemeClr val="dk1"/>
+                          </a:solidFill>
+                          <a:effectLst/>
+                          <a:latin typeface="+mn-lt"/>
+                          <a:ea typeface="+mn-ea"/>
+                          <a:cs typeface="+mn-cs"/>
+                        </a:rPr>
+                        <a:t>只下载远程更新，</a:t>
+                      </a:r>
+                      <a:r>
+                        <a:rPr lang="zh-CN" altLang="en-US" sz="1800" b="1" i="0" kern="1200">
+                          <a:solidFill>
+                            <a:schemeClr val="dk1"/>
+                          </a:solidFill>
+                          <a:effectLst/>
+                          <a:latin typeface="+mn-lt"/>
+                          <a:ea typeface="+mn-ea"/>
+                          <a:cs typeface="+mn-cs"/>
+                        </a:rPr>
+                        <a:t>不合并</a:t>
+                      </a:r>
+                      <a:r>
+                        <a:rPr lang="zh-CN" altLang="en-US" sz="1800" b="0" i="0" kern="1200">
+                          <a:solidFill>
+                            <a:schemeClr val="dk1"/>
+                          </a:solidFill>
+                          <a:effectLst/>
+                          <a:latin typeface="+mn-lt"/>
+                          <a:ea typeface="+mn-ea"/>
+                          <a:cs typeface="+mn-cs"/>
+                        </a:rPr>
+                        <a:t>到本地</a:t>
+                      </a:r>
+                      <a:endParaRPr lang="zh-CN" altLang="en-US">
+                        <a:effectLst/>
+                        <a:latin typeface="inherit"/>
+                      </a:endParaRPr>
+                    </a:p>
+                  </a:txBody>
+                  <a:tcPr marL="121920" marR="121920" marT="76200" marB="76200"/>
+                </a:tc>
+                <a:extLst>
+                  <a:ext uri="{0D108BD9-81ED-4DB2-BD59-A6C34878D82A}">
+                    <a16:rowId xmlns:a16="http://schemas.microsoft.com/office/drawing/2014/main" val="1294658617"/>
+                  </a:ext>
+                </a:extLst>
+              </a:tr>
+              <a:tr h="713489">
+                <a:tc>
+                  <a:txBody>
+                    <a:bodyPr/>
+                    <a:lstStyle/>
+                    <a:p>
+                      <a:pPr algn="l" fontAlgn="t"/>
+                      <a:endParaRPr lang="zh-CN" altLang="en-US">
+                        <a:effectLst/>
+                        <a:latin typeface="inherit"/>
+                      </a:endParaRPr>
+                    </a:p>
+                  </a:txBody>
+                  <a:tcPr marL="121920" marR="121920" marT="76200" marB="76200"/>
+                </a:tc>
+                <a:tc>
+                  <a:txBody>
+                    <a:bodyPr/>
+                    <a:lstStyle/>
+                    <a:p>
+                      <a:pPr algn="l" fontAlgn="t"/>
+                      <a:r>
+                        <a:rPr lang="zh-CN" altLang="en-US" b="1">
+                          <a:effectLst/>
+                          <a:latin typeface="inherit"/>
+                        </a:rPr>
+                        <a:t>拉取（</a:t>
+                      </a:r>
+                      <a:r>
+                        <a:rPr lang="en-US" b="1">
+                          <a:effectLst/>
+                          <a:latin typeface="inherit"/>
+                        </a:rPr>
+                        <a:t>Pull）</a:t>
+                      </a:r>
+                      <a:endParaRPr lang="en-US">
+                        <a:effectLst/>
+                        <a:latin typeface="inherit"/>
+                      </a:endParaRPr>
+                    </a:p>
+                  </a:txBody>
+                  <a:tcPr marL="121920" marR="121920" marT="76200" marB="76200"/>
+                </a:tc>
+                <a:tc>
+                  <a:txBody>
+                    <a:bodyPr/>
+                    <a:lstStyle/>
+                    <a:p>
+                      <a:pPr algn="l" fontAlgn="t"/>
+                      <a:r>
+                        <a:rPr lang="zh-CN" altLang="en-US">
+                          <a:effectLst/>
+                          <a:latin typeface="inherit"/>
+                        </a:rPr>
+                        <a:t>从远程仓库拉取最新代码</a:t>
+                      </a:r>
+                    </a:p>
+                  </a:txBody>
+                  <a:tcPr marL="121920" marR="121920" marT="76200" marB="76200"/>
+                </a:tc>
+                <a:extLst>
+                  <a:ext uri="{0D108BD9-81ED-4DB2-BD59-A6C34878D82A}">
+                    <a16:rowId xmlns:a16="http://schemas.microsoft.com/office/drawing/2014/main" val="4285017487"/>
+                  </a:ext>
+                </a:extLst>
+              </a:tr>
+              <a:tr h="713489">
+                <a:tc>
+                  <a:txBody>
+                    <a:bodyPr/>
+                    <a:lstStyle/>
+                    <a:p>
+                      <a:pPr algn="l" fontAlgn="t"/>
+                      <a:endParaRPr lang="zh-CN" altLang="en-US">
+                        <a:effectLst/>
+                        <a:latin typeface="inherit"/>
+                      </a:endParaRPr>
+                    </a:p>
+                  </a:txBody>
+                  <a:tcPr marL="121920" marR="121920" marT="76200" marB="76200"/>
+                </a:tc>
+                <a:tc>
+                  <a:txBody>
+                    <a:bodyPr/>
+                    <a:lstStyle/>
+                    <a:p>
+                      <a:pPr algn="l" fontAlgn="t"/>
+                      <a:r>
+                        <a:rPr lang="zh-CN" altLang="en-US" b="1">
+                          <a:effectLst/>
+                          <a:latin typeface="inherit"/>
+                        </a:rPr>
+                        <a:t>推送（</a:t>
+                      </a:r>
+                      <a:r>
+                        <a:rPr lang="en-US" b="1">
+                          <a:effectLst/>
+                          <a:latin typeface="inherit"/>
+                        </a:rPr>
+                        <a:t>Push）</a:t>
+                      </a:r>
+                      <a:endParaRPr lang="en-US">
+                        <a:effectLst/>
+                        <a:latin typeface="inherit"/>
+                      </a:endParaRPr>
+                    </a:p>
+                  </a:txBody>
+                  <a:tcPr marL="121920" marR="121920" marT="76200" marB="76200"/>
+                </a:tc>
+                <a:tc>
+                  <a:txBody>
+                    <a:bodyPr/>
+                    <a:lstStyle/>
+                    <a:p>
+                      <a:pPr algn="l" fontAlgn="t"/>
+                      <a:r>
+                        <a:rPr lang="zh-CN" altLang="en-US">
+                          <a:effectLst/>
+                          <a:latin typeface="inherit"/>
+                        </a:rPr>
+                        <a:t>将本地提交推送到远程仓库</a:t>
+                      </a:r>
+                    </a:p>
+                  </a:txBody>
+                  <a:tcPr marL="121920" marR="121920" marT="76200" marB="76200"/>
+                </a:tc>
+                <a:extLst>
+                  <a:ext uri="{0D108BD9-81ED-4DB2-BD59-A6C34878D82A}">
+                    <a16:rowId xmlns:a16="http://schemas.microsoft.com/office/drawing/2014/main" val="3417305871"/>
+                  </a:ext>
+                </a:extLst>
+              </a:tr>
+              <a:tr h="713489">
+                <a:tc>
+                  <a:txBody>
+                    <a:bodyPr/>
+                    <a:lstStyle/>
+                    <a:p>
+                      <a:pPr algn="l" fontAlgn="t"/>
+                      <a:endParaRPr lang="zh-CN" altLang="en-US">
+                        <a:effectLst/>
+                        <a:latin typeface="inherit"/>
+                      </a:endParaRPr>
+                    </a:p>
+                  </a:txBody>
+                  <a:tcPr marL="121920" marR="121920" marT="76200" marB="76200"/>
+                </a:tc>
+                <a:tc>
+                  <a:txBody>
+                    <a:bodyPr/>
+                    <a:lstStyle/>
+                    <a:p>
+                      <a:pPr algn="l" fontAlgn="t"/>
+                      <a:r>
+                        <a:rPr lang="zh-CN" altLang="en-US" b="1">
+                          <a:effectLst/>
+                          <a:latin typeface="inherit"/>
+                        </a:rPr>
+                        <a:t>刷新</a:t>
+                      </a:r>
+                      <a:endParaRPr lang="zh-CN" altLang="en-US">
+                        <a:effectLst/>
+                        <a:latin typeface="inherit"/>
+                      </a:endParaRPr>
+                    </a:p>
+                  </a:txBody>
+                  <a:tcPr marL="121920" marR="121920" marT="76200" marB="76200"/>
+                </a:tc>
+                <a:tc>
+                  <a:txBody>
+                    <a:bodyPr/>
+                    <a:lstStyle/>
+                    <a:p>
+                      <a:pPr algn="l" fontAlgn="t"/>
+                      <a:r>
+                        <a:rPr lang="zh-CN" altLang="en-US">
+                          <a:effectLst/>
+                          <a:latin typeface="inherit"/>
+                        </a:rPr>
+                        <a:t>刷新 </a:t>
+                      </a:r>
+                      <a:r>
+                        <a:rPr lang="en-US" altLang="zh-CN">
+                          <a:effectLst/>
+                          <a:latin typeface="inherit"/>
+                        </a:rPr>
+                        <a:t>Git </a:t>
+                      </a:r>
+                      <a:r>
+                        <a:rPr lang="zh-CN" altLang="en-US">
+                          <a:effectLst/>
+                          <a:latin typeface="inherit"/>
+                        </a:rPr>
+                        <a:t>状态，更新图表和文件列表</a:t>
+                      </a:r>
+                    </a:p>
+                  </a:txBody>
+                  <a:tcPr marL="121920" marR="121920" marT="76200" marB="76200"/>
+                </a:tc>
+                <a:extLst>
+                  <a:ext uri="{0D108BD9-81ED-4DB2-BD59-A6C34878D82A}">
+                    <a16:rowId xmlns:a16="http://schemas.microsoft.com/office/drawing/2014/main" val="402597377"/>
+                  </a:ext>
+                </a:extLst>
+              </a:tr>
+            </a:tbl>
+          </a:graphicData>
+        </a:graphic>
+      </p:graphicFrame>
+      <p:pic>
+        <p:nvPicPr>
+          <p:cNvPr id="16" name="图片 15">
+            <a:extLst>
+              <a:ext uri="{FF2B5EF4-FFF2-40B4-BE49-F238E27FC236}">
+                <a16:creationId xmlns:a16="http://schemas.microsoft.com/office/drawing/2014/main" id="{94126D4F-5352-4868-B96F-2A1F98BA86D0}"/>
+              </a:ext>
+            </a:extLst>
+          </p:cNvPr>
+          <p:cNvPicPr>
+            <a:picLocks noChangeAspect="1"/>
+          </p:cNvPicPr>
+          <p:nvPr/>
+        </p:nvPicPr>
+        <p:blipFill>
+          <a:blip r:embed="rId5"/>
+          <a:stretch>
+            <a:fillRect/>
+          </a:stretch>
+        </p:blipFill>
+        <p:spPr>
+          <a:xfrm>
+            <a:off x="509368" y="2096625"/>
+            <a:ext cx="950374" cy="526361"/>
+          </a:xfrm>
+          <a:prstGeom prst="rect">
+            <a:avLst/>
+          </a:prstGeom>
+        </p:spPr>
+      </p:pic>
+      <p:pic>
+        <p:nvPicPr>
+          <p:cNvPr id="18" name="图片 17">
+            <a:extLst>
+              <a:ext uri="{FF2B5EF4-FFF2-40B4-BE49-F238E27FC236}">
+                <a16:creationId xmlns:a16="http://schemas.microsoft.com/office/drawing/2014/main" id="{E92F77B9-278D-4131-BFE2-DC3C6BEDCB13}"/>
+              </a:ext>
+            </a:extLst>
+          </p:cNvPr>
+          <p:cNvPicPr>
+            <a:picLocks noChangeAspect="1"/>
+          </p:cNvPicPr>
+          <p:nvPr/>
+        </p:nvPicPr>
+        <p:blipFill>
+          <a:blip r:embed="rId6"/>
+          <a:stretch>
+            <a:fillRect/>
+          </a:stretch>
+        </p:blipFill>
+        <p:spPr>
+          <a:xfrm>
+            <a:off x="655362" y="2780691"/>
+            <a:ext cx="588562" cy="557586"/>
+          </a:xfrm>
+          <a:prstGeom prst="rect">
+            <a:avLst/>
+          </a:prstGeom>
+        </p:spPr>
+      </p:pic>
+      <p:pic>
+        <p:nvPicPr>
+          <p:cNvPr id="19" name="图片 18">
+            <a:extLst>
+              <a:ext uri="{FF2B5EF4-FFF2-40B4-BE49-F238E27FC236}">
+                <a16:creationId xmlns:a16="http://schemas.microsoft.com/office/drawing/2014/main" id="{6EACE44A-47AA-449F-B314-E9D2BF8454C6}"/>
+              </a:ext>
+            </a:extLst>
+          </p:cNvPr>
+          <p:cNvPicPr>
+            <a:picLocks noChangeAspect="1"/>
+          </p:cNvPicPr>
+          <p:nvPr/>
+        </p:nvPicPr>
+        <p:blipFill>
+          <a:blip r:embed="rId7"/>
+          <a:stretch>
+            <a:fillRect/>
+          </a:stretch>
+        </p:blipFill>
+        <p:spPr>
+          <a:xfrm>
+            <a:off x="620539" y="3539044"/>
+            <a:ext cx="594279" cy="526361"/>
+          </a:xfrm>
+          <a:prstGeom prst="rect">
+            <a:avLst/>
+          </a:prstGeom>
+        </p:spPr>
+      </p:pic>
+      <p:pic>
+        <p:nvPicPr>
+          <p:cNvPr id="21" name="图片 20">
+            <a:extLst>
+              <a:ext uri="{FF2B5EF4-FFF2-40B4-BE49-F238E27FC236}">
+                <a16:creationId xmlns:a16="http://schemas.microsoft.com/office/drawing/2014/main" id="{4DDC5212-966F-4A3B-A99D-3BEE99CD6EE5}"/>
+              </a:ext>
+            </a:extLst>
+          </p:cNvPr>
+          <p:cNvPicPr>
+            <a:picLocks noChangeAspect="1"/>
+          </p:cNvPicPr>
+          <p:nvPr/>
+        </p:nvPicPr>
+        <p:blipFill>
+          <a:blip r:embed="rId8"/>
+          <a:stretch>
+            <a:fillRect/>
+          </a:stretch>
+        </p:blipFill>
+        <p:spPr>
+          <a:xfrm>
+            <a:off x="688396" y="4256609"/>
+            <a:ext cx="498300" cy="553665"/>
+          </a:xfrm>
+          <a:prstGeom prst="rect">
+            <a:avLst/>
+          </a:prstGeom>
+        </p:spPr>
+      </p:pic>
+      <p:pic>
+        <p:nvPicPr>
+          <p:cNvPr id="23" name="图片 22">
+            <a:extLst>
+              <a:ext uri="{FF2B5EF4-FFF2-40B4-BE49-F238E27FC236}">
+                <a16:creationId xmlns:a16="http://schemas.microsoft.com/office/drawing/2014/main" id="{ACEEA88D-537D-4CC7-880C-1DE0AB9D1DF7}"/>
+              </a:ext>
+            </a:extLst>
+          </p:cNvPr>
+          <p:cNvPicPr>
+            <a:picLocks noChangeAspect="1"/>
+          </p:cNvPicPr>
+          <p:nvPr/>
+        </p:nvPicPr>
+        <p:blipFill>
+          <a:blip r:embed="rId9"/>
+          <a:stretch>
+            <a:fillRect/>
+          </a:stretch>
+        </p:blipFill>
+        <p:spPr>
+          <a:xfrm>
+            <a:off x="737060" y="4976334"/>
+            <a:ext cx="446282" cy="529960"/>
+          </a:xfrm>
+          <a:prstGeom prst="rect">
+            <a:avLst/>
+          </a:prstGeom>
+        </p:spPr>
+      </p:pic>
+      <p:pic>
+        <p:nvPicPr>
+          <p:cNvPr id="25" name="图片 24">
+            <a:extLst>
+              <a:ext uri="{FF2B5EF4-FFF2-40B4-BE49-F238E27FC236}">
+                <a16:creationId xmlns:a16="http://schemas.microsoft.com/office/drawing/2014/main" id="{BFDDB5C6-03FD-4CE6-83A4-4AA99E9C05A7}"/>
+              </a:ext>
+            </a:extLst>
+          </p:cNvPr>
+          <p:cNvPicPr>
+            <a:picLocks noChangeAspect="1"/>
+          </p:cNvPicPr>
+          <p:nvPr/>
+        </p:nvPicPr>
+        <p:blipFill>
+          <a:blip r:embed="rId10"/>
+          <a:stretch>
+            <a:fillRect/>
+          </a:stretch>
+        </p:blipFill>
+        <p:spPr>
+          <a:xfrm>
+            <a:off x="706575" y="5683849"/>
+            <a:ext cx="476767" cy="553666"/>
+          </a:xfrm>
+          <a:prstGeom prst="rect">
+            <a:avLst/>
+          </a:prstGeom>
+        </p:spPr>
+      </p:pic>
+    </p:spTree>
+    <p:extLst>
+      <p:ext uri="{BB962C8B-B14F-4D97-AF65-F5344CB8AC3E}">
+        <p14:creationId xmlns:p14="http://schemas.microsoft.com/office/powerpoint/2010/main" val="1499881241"/>
+      </p:ext>
+    </p:extLst>
+  </p:cSld>
+  <p:clrMapOvr>
+    <a:masterClrMapping/>
+  </p:clrMapOvr>
+  <p:transition>
+    <p:fade/>
+  </p:transition>
+</p:sld>
+</file>
+
+<file path=ppt/slides/slide9.xml><?xml version="1.0" encoding="utf-8"?>
 <p:sld xmlns:a="http://schemas.openxmlformats.org/drawingml/2006/main" xmlns:r="http://schemas.openxmlformats.org/officeDocument/2006/relationships" xmlns:p="http://schemas.openxmlformats.org/presentationml/2006/main">
   <p:cSld>
     <p:bg>
@@ -6351,7 +7694,7 @@
                   <a:schemeClr val="bg1"/>
                 </a:solidFill>
               </a:rPr>
-              <a:t>7</a:t>
+              <a:t>9</a:t>
             </a:fld>
             <a:endParaRPr lang="zh-CN" altLang="en-US">
               <a:solidFill>
@@ -7291,7 +8634,7 @@
               <a:rPr lang="zh-CN" altLang="en-US" b="1">
                 <a:latin typeface="+mn-ea"/>
               </a:rPr>
-              <a:t>查琪乐、褚茂誉、邱嘉堃</a:t>
+              <a:t>查琪乐</a:t>
             </a:r>
             <a:endParaRPr lang="en-US" altLang="zh-CN" sz="1800" b="1">
               <a:latin typeface="+mn-ea"/>

--- a/PPT/开源软件通识-第十八周汇报.pptx
+++ b/PPT/开源软件通识-第十八周汇报.pptx
@@ -242,7 +242,7 @@
           <a:p>
             <a:fld id="{7B469C68-B96B-4B00-A936-4ED691395EEA}" type="datetimeFigureOut">
               <a:rPr lang="zh-CN" altLang="en-US" smtClean="0"/>
-              <a:t>2026/6/26</a:t>
+              <a:t>2026/6/27</a:t>
             </a:fld>
             <a:endParaRPr lang="zh-CN" altLang="en-US" dirty="0"/>
           </a:p>
@@ -1308,90 +1308,174 @@
           <a:bodyPr/>
           <a:lstStyle/>
           <a:p>
-            <a:pPr algn="l" fontAlgn="base">
-              <a:buFont typeface="Arial" panose="020B0604020202020204" pitchFamily="34" charset="0"/>
-              <a:buChar char="•"/>
-            </a:pPr>
-            <a:r>
-              <a:rPr lang="zh-CN" altLang="en-US" b="0" i="0">
-                <a:effectLst/>
-                <a:latin typeface="inherit"/>
-              </a:rPr>
-              <a:t>点击左下角状态栏的当前分支名，可快速：</a:t>
-            </a:r>
-          </a:p>
-          <a:p>
-            <a:pPr marL="742950" lvl="1" indent="-285750" algn="l" fontAlgn="base">
-              <a:buFont typeface="Arial" panose="020B0604020202020204" pitchFamily="34" charset="0"/>
-              <a:buChar char="•"/>
-            </a:pPr>
-            <a:r>
-              <a:rPr lang="zh-CN" altLang="en-US" b="0" i="0">
-                <a:effectLst/>
-                <a:latin typeface="inherit"/>
-              </a:rPr>
-              <a:t>切换分支</a:t>
-            </a:r>
-          </a:p>
-          <a:p>
-            <a:pPr marL="742950" lvl="1" indent="-285750" algn="l" fontAlgn="base">
-              <a:buFont typeface="Arial" panose="020B0604020202020204" pitchFamily="34" charset="0"/>
-              <a:buChar char="•"/>
-            </a:pPr>
-            <a:r>
-              <a:rPr lang="zh-CN" altLang="en-US" b="0" i="0">
-                <a:effectLst/>
-                <a:latin typeface="inherit"/>
-              </a:rPr>
-              <a:t>创建新分支</a:t>
-            </a:r>
-          </a:p>
-          <a:p>
-            <a:pPr marL="742950" lvl="1" indent="-285750" algn="l" fontAlgn="base">
-              <a:buFont typeface="Arial" panose="020B0604020202020204" pitchFamily="34" charset="0"/>
-              <a:buChar char="•"/>
-            </a:pPr>
-            <a:r>
-              <a:rPr lang="zh-CN" altLang="en-US" b="0" i="0">
-                <a:effectLst/>
-                <a:latin typeface="inherit"/>
-              </a:rPr>
-              <a:t>合并分支</a:t>
-            </a:r>
-          </a:p>
-          <a:p>
-            <a:pPr marL="742950" lvl="1" indent="-285750" algn="l" fontAlgn="base">
-              <a:buFont typeface="Arial" panose="020B0604020202020204" pitchFamily="34" charset="0"/>
-              <a:buChar char="•"/>
-            </a:pPr>
-            <a:r>
-              <a:rPr lang="zh-CN" altLang="en-US" b="0" i="0">
-                <a:effectLst/>
-                <a:latin typeface="inherit"/>
-              </a:rPr>
-              <a:t>拉取</a:t>
-            </a:r>
-            <a:r>
-              <a:rPr lang="en-US" altLang="zh-CN" b="0" i="0">
-                <a:effectLst/>
-                <a:latin typeface="inherit"/>
-              </a:rPr>
-              <a:t>/</a:t>
-            </a:r>
-            <a:r>
-              <a:rPr lang="zh-CN" altLang="en-US" b="0" i="0">
-                <a:effectLst/>
-                <a:latin typeface="inherit"/>
-              </a:rPr>
-              <a:t>推送</a:t>
-            </a:r>
-          </a:p>
-          <a:p>
             <a:pPr marL="0" indent="0" algn="l">
               <a:lnSpc>
                 <a:spcPct val="100000"/>
               </a:lnSpc>
             </a:pPr>
+            <a:r>
+              <a:rPr lang="en-US" altLang="zh-CN" sz="1200" b="0" i="0" u="none" strike="noStrike">
+                <a:solidFill>
+                  <a:srgbClr val="000000"/>
+                </a:solidFill>
+              </a:rPr>
+              <a:t>1. </a:t>
+            </a:r>
+            <a:r>
+              <a:rPr lang="zh-CN" altLang="en-US" sz="1200" b="0" i="0" u="none" strike="noStrike">
+                <a:solidFill>
+                  <a:srgbClr val="000000"/>
+                </a:solidFill>
+              </a:rPr>
+              <a:t>先点 ⬇ 抓取（</a:t>
+            </a:r>
+            <a:r>
+              <a:rPr lang="en-US" altLang="zh-CN" sz="1200" b="0" i="0" u="none" strike="noStrike">
+                <a:solidFill>
+                  <a:srgbClr val="000000"/>
+                </a:solidFill>
+              </a:rPr>
+              <a:t>Fetch</a:t>
+            </a:r>
+            <a:r>
+              <a:rPr lang="zh-CN" altLang="en-US" sz="1200" b="0" i="0" u="none" strike="noStrike">
+                <a:solidFill>
+                  <a:srgbClr val="000000"/>
+                </a:solidFill>
+              </a:rPr>
+              <a:t>）</a:t>
+            </a:r>
+          </a:p>
+          <a:p>
+            <a:pPr marL="0" indent="0" algn="l">
+              <a:lnSpc>
+                <a:spcPct val="100000"/>
+              </a:lnSpc>
+            </a:pPr>
+            <a:r>
+              <a:rPr lang="zh-CN" altLang="en-US" sz="1200" b="0" i="0" u="none" strike="noStrike">
+                <a:solidFill>
+                  <a:srgbClr val="000000"/>
+                </a:solidFill>
+              </a:rPr>
+              <a:t>   → 下载远程最新提交，本地代码不动</a:t>
+            </a:r>
+          </a:p>
+          <a:p>
+            <a:pPr marL="0" indent="0" algn="l">
+              <a:lnSpc>
+                <a:spcPct val="100000"/>
+              </a:lnSpc>
+            </a:pPr>
+            <a:endParaRPr lang="zh-CN" altLang="en-US" sz="1200" b="0" i="0" u="none" strike="noStrike">
+              <a:solidFill>
+                <a:srgbClr val="000000"/>
+              </a:solidFill>
+            </a:endParaRPr>
+          </a:p>
+          <a:p>
+            <a:pPr marL="0" indent="0" algn="l">
+              <a:lnSpc>
+                <a:spcPct val="100000"/>
+              </a:lnSpc>
+            </a:pPr>
+            <a:r>
+              <a:rPr lang="en-US" altLang="zh-CN" sz="1200" b="0" i="0" u="none" strike="noStrike">
+                <a:solidFill>
+                  <a:srgbClr val="000000"/>
+                </a:solidFill>
+              </a:rPr>
+              <a:t>2. </a:t>
+            </a:r>
+            <a:r>
+              <a:rPr lang="zh-CN" altLang="en-US" sz="1200" b="0" i="0" u="none" strike="noStrike">
+                <a:solidFill>
+                  <a:srgbClr val="000000"/>
+                </a:solidFill>
+              </a:rPr>
+              <a:t>查看远程更新内容</a:t>
+            </a:r>
+          </a:p>
+          <a:p>
+            <a:pPr marL="0" indent="0" algn="l">
+              <a:lnSpc>
+                <a:spcPct val="100000"/>
+              </a:lnSpc>
+            </a:pPr>
+            <a:r>
+              <a:rPr lang="zh-CN" altLang="en-US" sz="1200" b="0" i="0" u="none" strike="noStrike">
+                <a:solidFill>
+                  <a:srgbClr val="000000"/>
+                </a:solidFill>
+              </a:rPr>
+              <a:t>   → 对比差异，确认没问题</a:t>
+            </a:r>
+          </a:p>
+          <a:p>
+            <a:pPr marL="0" indent="0" algn="l">
+              <a:lnSpc>
+                <a:spcPct val="100000"/>
+              </a:lnSpc>
+            </a:pPr>
+            <a:endParaRPr lang="zh-CN" altLang="en-US" sz="1200" b="0" i="0" u="none" strike="noStrike">
+              <a:solidFill>
+                <a:srgbClr val="000000"/>
+              </a:solidFill>
+            </a:endParaRPr>
+          </a:p>
+          <a:p>
+            <a:pPr marL="0" indent="0" algn="l">
+              <a:lnSpc>
+                <a:spcPct val="100000"/>
+              </a:lnSpc>
+            </a:pPr>
+            <a:r>
+              <a:rPr lang="en-US" altLang="zh-CN" sz="1200" b="0" i="0" u="none" strike="noStrike">
+                <a:solidFill>
+                  <a:srgbClr val="000000"/>
+                </a:solidFill>
+              </a:rPr>
+              <a:t>3. </a:t>
+            </a:r>
+            <a:r>
+              <a:rPr lang="zh-CN" altLang="en-US" sz="1200" b="0" i="0" u="none" strike="noStrike">
+                <a:solidFill>
+                  <a:srgbClr val="000000"/>
+                </a:solidFill>
+              </a:rPr>
+              <a:t>再点 ⬇ 拉取（</a:t>
+            </a:r>
+            <a:r>
+              <a:rPr lang="en-US" altLang="zh-CN" sz="1200" b="0" i="0" u="none" strike="noStrike">
+                <a:solidFill>
+                  <a:srgbClr val="000000"/>
+                </a:solidFill>
+              </a:rPr>
+              <a:t>Pull</a:t>
+            </a:r>
+            <a:r>
+              <a:rPr lang="zh-CN" altLang="en-US" sz="1200" b="0" i="0" u="none" strike="noStrike">
+                <a:solidFill>
+                  <a:srgbClr val="000000"/>
+                </a:solidFill>
+              </a:rPr>
+              <a:t>）或手动合并</a:t>
+            </a:r>
+          </a:p>
+          <a:p>
+            <a:pPr marL="0" indent="0" algn="l">
+              <a:lnSpc>
+                <a:spcPct val="100000"/>
+              </a:lnSpc>
+            </a:pPr>
+            <a:r>
+              <a:rPr lang="zh-CN" altLang="en-US" sz="1200" b="0" i="0" u="none" strike="noStrike">
+                <a:solidFill>
+                  <a:srgbClr val="000000"/>
+                </a:solidFill>
+              </a:rPr>
+              <a:t>   → 将远程代码合并到本地</a:t>
+            </a:r>
             <a:endParaRPr lang="en-US" altLang="zh-CN" sz="1200" b="0" i="0" u="none" strike="noStrike">
               <a:solidFill>
                 <a:srgbClr val="000000"/>
@@ -2202,7 +2286,7 @@
           <a:p>
             <a:fld id="{A5BA3452-3CC8-4E8B-993B-C9E13B0C4846}" type="datetime1">
               <a:rPr lang="zh-CN" altLang="en-US" smtClean="0"/>
-              <a:t>2026/6/26</a:t>
+              <a:t>2026/6/27</a:t>
             </a:fld>
             <a:endParaRPr lang="zh-CN" altLang="en-US"/>
           </a:p>
@@ -5456,10 +5540,10 @@
       </p:sp>
       <p:pic>
         <p:nvPicPr>
-          <p:cNvPr id="6" name="图片 5">
+          <p:cNvPr id="7" name="图片 6">
             <a:extLst>
               <a:ext uri="{FF2B5EF4-FFF2-40B4-BE49-F238E27FC236}">
-                <a16:creationId xmlns:a16="http://schemas.microsoft.com/office/drawing/2014/main" id="{879229A4-5A92-427E-9038-0AA6D8FDDD17}"/>
+                <a16:creationId xmlns:a16="http://schemas.microsoft.com/office/drawing/2014/main" id="{AE63DEAD-B887-43C3-ACB1-B323ADCBD030}"/>
               </a:ext>
             </a:extLst>
           </p:cNvPr>
@@ -5476,8 +5560,8 @@
         </p:blipFill>
         <p:spPr>
           <a:xfrm>
-            <a:off x="4672315" y="2619672"/>
-            <a:ext cx="6873836" cy="1920406"/>
+            <a:off x="5255035" y="1293867"/>
+            <a:ext cx="5491934" cy="5100885"/>
           </a:xfrm>
           <a:prstGeom prst="rect">
             <a:avLst/>
